--- a/docs/EasyIndexer_Introduction.pptx
+++ b/docs/EasyIndexer_Introduction.pptx
@@ -251,7 +251,7 @@
             <a:fld id="{294670BC-B8C6-44A7-84E1-23632D8FD86F}" type="datetimeFigureOut">
               <a:rPr lang="ja-JP" altLang="en-US" smtClean="0"/>
               <a:pPr/>
-              <a:t>2025/2/22</a:t>
+              <a:t>2025/3/8</a:t>
             </a:fld>
             <a:endParaRPr lang="ja-JP" altLang="en-US"/>
           </a:p>
@@ -2494,7 +2494,7 @@
             </a:r>
             <a:r>
               <a:rPr lang="en-US" altLang="ja-JP" sz="2000"/>
-              <a:t> 2025/2/22</a:t>
+              <a:t> 2025/3/7</a:t>
             </a:r>
             <a:r>
               <a:rPr lang="ja-JP" altLang="en-US" sz="2000"/>
@@ -2502,7 +2502,7 @@
             </a:r>
             <a:r>
               <a:rPr lang="en-US" altLang="ja-JP" sz="2000"/>
-              <a:t>Version 1.0</a:t>
+              <a:t>Version 1.1</a:t>
             </a:r>
           </a:p>
         </p:txBody>
@@ -3072,12 +3072,8 @@
           <a:lstStyle/>
           <a:p>
             <a:r>
-              <a:rPr kumimoji="1" lang="en-US" altLang="ja-JP"/>
-              <a:t>PpEasyIndexer</a:t>
-            </a:r>
-            <a:r>
               <a:rPr kumimoji="1" lang="ja-JP" altLang="en-US"/>
-              <a:t>とは？</a:t>
+              <a:t>目的は自動・章節ナンバリング</a:t>
             </a:r>
           </a:p>
         </p:txBody>
@@ -3164,7 +3160,7 @@
         <p:spPr bwMode="auto">
           <a:xfrm>
             <a:off x="1127453" y="1196752"/>
-            <a:ext cx="9577065" cy="1015665"/>
+            <a:ext cx="9577065" cy="923332"/>
           </a:xfrm>
           <a:prstGeom prst="rect">
             <a:avLst/>
@@ -3204,20 +3200,20 @@
           <a:p>
             <a:pPr eaLnBrk="1"/>
             <a:r>
-              <a:rPr lang="en-US" altLang="ja-JP" kern="0">
-                <a:latin typeface="BIZ UDPゴシック" panose="020B0400000000000000" pitchFamily="50" charset="-128"/>
-                <a:ea typeface="BIZ UDPゴシック" panose="020B0400000000000000" pitchFamily="50" charset="-128"/>
-              </a:rPr>
-              <a:t>PowerPoint </a:t>
-            </a:r>
-            <a:r>
-              <a:rPr lang="ja-JP" altLang="en-US" kern="0">
-                <a:latin typeface="BIZ UDPゴシック" panose="020B0400000000000000" pitchFamily="50" charset="-128"/>
-                <a:ea typeface="BIZ UDPゴシック" panose="020B0400000000000000" pitchFamily="50" charset="-128"/>
-              </a:rPr>
-              <a:t>のファイルへの章・節番号の自動ナンバリングを簡単に行うツール。</a:t>
-            </a:r>
-            <a:endParaRPr lang="en-US" altLang="ja-JP" kern="0">
+              <a:rPr lang="en-US" altLang="ja-JP" sz="1800" kern="0">
+                <a:latin typeface="BIZ UDPゴシック" panose="020B0400000000000000" pitchFamily="50" charset="-128"/>
+                <a:ea typeface="BIZ UDPゴシック" panose="020B0400000000000000" pitchFamily="50" charset="-128"/>
+              </a:rPr>
+              <a:t>source.pptx </a:t>
+            </a:r>
+            <a:r>
+              <a:rPr lang="ja-JP" altLang="en-US" sz="1800" kern="0">
+                <a:latin typeface="BIZ UDPゴシック" panose="020B0400000000000000" pitchFamily="50" charset="-128"/>
+                <a:ea typeface="BIZ UDPゴシック" panose="020B0400000000000000" pitchFamily="50" charset="-128"/>
+              </a:rPr>
+              <a:t>は、「表紙」「はじめに」、につづくＡ～Ｇのスライドで構成されているとします。</a:t>
+            </a:r>
+            <a:endParaRPr lang="en-US" altLang="ja-JP" sz="1800" kern="0">
               <a:latin typeface="BIZ UDPゴシック" panose="020B0400000000000000" pitchFamily="50" charset="-128"/>
               <a:ea typeface="BIZ UDPゴシック" panose="020B0400000000000000" pitchFamily="50" charset="-128"/>
             </a:endParaRPr>
@@ -3225,39 +3221,69 @@
           <a:p>
             <a:pPr eaLnBrk="1"/>
             <a:r>
-              <a:rPr lang="ja-JP" altLang="en-US" kern="0">
-                <a:latin typeface="BIZ UDPゴシック" panose="020B0400000000000000" pitchFamily="50" charset="-128"/>
-                <a:ea typeface="BIZ UDPゴシック" panose="020B0400000000000000" pitchFamily="50" charset="-128"/>
-              </a:rPr>
-              <a:t>動作イメージは下記の通り、「区切りスライド」を指定して変換をかけると、それに従って自動的に章節番号を設定した新たな</a:t>
-            </a:r>
-            <a:r>
-              <a:rPr lang="en-US" altLang="ja-JP" kern="0">
-                <a:latin typeface="BIZ UDPゴシック" panose="020B0400000000000000" pitchFamily="50" charset="-128"/>
-                <a:ea typeface="BIZ UDPゴシック" panose="020B0400000000000000" pitchFamily="50" charset="-128"/>
-              </a:rPr>
-              <a:t>PPTX</a:t>
-            </a:r>
-            <a:r>
-              <a:rPr lang="ja-JP" altLang="en-US" kern="0">
-                <a:latin typeface="BIZ UDPゴシック" panose="020B0400000000000000" pitchFamily="50" charset="-128"/>
-                <a:ea typeface="BIZ UDPゴシック" panose="020B0400000000000000" pitchFamily="50" charset="-128"/>
-              </a:rPr>
-              <a:t>ファイルを生成します。</a:t>
-            </a:r>
-            <a:endParaRPr lang="en-US" altLang="ja-JP" kern="0">
+              <a:rPr lang="ja-JP" altLang="en-US" sz="1800" kern="0">
+                <a:latin typeface="BIZ UDPゴシック" panose="020B0400000000000000" pitchFamily="50" charset="-128"/>
+                <a:ea typeface="BIZ UDPゴシック" panose="020B0400000000000000" pitchFamily="50" charset="-128"/>
+              </a:rPr>
+              <a:t>これに対して変換をかけて </a:t>
+            </a:r>
+            <a:r>
+              <a:rPr lang="en-US" altLang="ja-JP" sz="1800" kern="0">
+                <a:latin typeface="BIZ UDPゴシック" panose="020B0400000000000000" pitchFamily="50" charset="-128"/>
+                <a:ea typeface="BIZ UDPゴシック" panose="020B0400000000000000" pitchFamily="50" charset="-128"/>
+              </a:rPr>
+              <a:t>target.pptx </a:t>
+            </a:r>
+            <a:r>
+              <a:rPr lang="ja-JP" altLang="en-US" sz="1800" kern="0">
+                <a:latin typeface="BIZ UDPゴシック" panose="020B0400000000000000" pitchFamily="50" charset="-128"/>
+                <a:ea typeface="BIZ UDPゴシック" panose="020B0400000000000000" pitchFamily="50" charset="-128"/>
+              </a:rPr>
+              <a:t>のように章・節番号を自動的に付与することが目的です。</a:t>
+            </a:r>
+            <a:endParaRPr lang="en-US" altLang="ja-JP" sz="1800" kern="0">
               <a:latin typeface="BIZ UDPゴシック" panose="020B0400000000000000" pitchFamily="50" charset="-128"/>
               <a:ea typeface="BIZ UDPゴシック" panose="020B0400000000000000" pitchFamily="50" charset="-128"/>
             </a:endParaRPr>
           </a:p>
         </p:txBody>
       </p:sp>
-      <p:sp>
-        <p:nvSpPr>
-          <p:cNvPr id="13" name="テキスト ボックス 12">
-            <a:extLst>
-              <a:ext uri="{FF2B5EF4-FFF2-40B4-BE49-F238E27FC236}">
-                <a16:creationId xmlns:a16="http://schemas.microsoft.com/office/drawing/2014/main" id="{8DD3AC99-2BF3-0679-AD20-84D9121C585B}"/>
+      <p:pic>
+        <p:nvPicPr>
+          <p:cNvPr id="35" name="図 34">
+            <a:extLst>
+              <a:ext uri="{FF2B5EF4-FFF2-40B4-BE49-F238E27FC236}">
+                <a16:creationId xmlns:a16="http://schemas.microsoft.com/office/drawing/2014/main" id="{B0902A5E-F3EA-CE97-084B-89794556185C}"/>
+              </a:ext>
+            </a:extLst>
+          </p:cNvPr>
+          <p:cNvPicPr>
+            <a:picLocks noChangeAspect="1"/>
+          </p:cNvPicPr>
+          <p:nvPr/>
+        </p:nvPicPr>
+        <p:blipFill>
+          <a:blip r:embed="rId2"/>
+          <a:stretch>
+            <a:fillRect/>
+          </a:stretch>
+        </p:blipFill>
+        <p:spPr>
+          <a:xfrm>
+            <a:off x="1205217" y="2411023"/>
+            <a:ext cx="608368" cy="665626"/>
+          </a:xfrm>
+          <a:prstGeom prst="rect">
+            <a:avLst/>
+          </a:prstGeom>
+        </p:spPr>
+      </p:pic>
+      <p:sp>
+        <p:nvSpPr>
+          <p:cNvPr id="3" name="テキスト ボックス 2">
+            <a:extLst>
+              <a:ext uri="{FF2B5EF4-FFF2-40B4-BE49-F238E27FC236}">
+                <a16:creationId xmlns:a16="http://schemas.microsoft.com/office/drawing/2014/main" id="{00D6CDEB-A62F-F89D-2D65-9A90D564766E}"/>
               </a:ext>
             </a:extLst>
           </p:cNvPr>
@@ -3266,8 +3292,8 @@
         </p:nvSpPr>
         <p:spPr bwMode="auto">
           <a:xfrm>
-            <a:off x="4613472" y="3739953"/>
-            <a:ext cx="1251918" cy="369334"/>
+            <a:off x="1127453" y="2715304"/>
+            <a:ext cx="2935882" cy="369334"/>
           </a:xfrm>
           <a:prstGeom prst="rect">
             <a:avLst/>
@@ -3307,11 +3333,11 @@
           <a:p>
             <a:pPr algn="ctr" eaLnBrk="1"/>
             <a:r>
-              <a:rPr lang="ja-JP" altLang="en-US" sz="1800" kern="0">
-                <a:latin typeface="BIZ UDPゴシック" panose="020B0400000000000000" pitchFamily="50" charset="-128"/>
-                <a:ea typeface="BIZ UDPゴシック" panose="020B0400000000000000" pitchFamily="50" charset="-128"/>
-              </a:rPr>
-              <a:t>区切り</a:t>
+              <a:rPr kumimoji="1" lang="ja-JP" altLang="en-US" sz="1800" kern="0">
+                <a:latin typeface="BIZ UDPゴシック" panose="020B0400000000000000" pitchFamily="50" charset="-128"/>
+                <a:ea typeface="BIZ UDPゴシック" panose="020B0400000000000000" pitchFamily="50" charset="-128"/>
+              </a:rPr>
+              <a:t>スライド一覧</a:t>
             </a:r>
             <a:endParaRPr kumimoji="1" lang="en-US" altLang="ja-JP" sz="1800" kern="0">
               <a:latin typeface="BIZ UDPゴシック" panose="020B0400000000000000" pitchFamily="50" charset="-128"/>
@@ -3320,42 +3346,265 @@
           </a:p>
         </p:txBody>
       </p:sp>
-      <p:pic>
-        <p:nvPicPr>
-          <p:cNvPr id="35" name="図 34">
-            <a:extLst>
-              <a:ext uri="{FF2B5EF4-FFF2-40B4-BE49-F238E27FC236}">
-                <a16:creationId xmlns:a16="http://schemas.microsoft.com/office/drawing/2014/main" id="{B0902A5E-F3EA-CE97-084B-89794556185C}"/>
-              </a:ext>
-            </a:extLst>
-          </p:cNvPr>
-          <p:cNvPicPr>
-            <a:picLocks noChangeAspect="1"/>
-          </p:cNvPicPr>
+      <p:sp>
+        <p:nvSpPr>
+          <p:cNvPr id="7" name="正方形/長方形 6">
+            <a:extLst>
+              <a:ext uri="{FF2B5EF4-FFF2-40B4-BE49-F238E27FC236}">
+                <a16:creationId xmlns:a16="http://schemas.microsoft.com/office/drawing/2014/main" id="{FAD78312-AFF6-BA37-4121-38F71316FF8E}"/>
+              </a:ext>
+            </a:extLst>
+          </p:cNvPr>
+          <p:cNvSpPr/>
           <p:nvPr/>
-        </p:nvPicPr>
-        <p:blipFill>
-          <a:blip r:embed="rId2"/>
-          <a:stretch>
-            <a:fillRect/>
-          </a:stretch>
-        </p:blipFill>
-        <p:spPr>
+        </p:nvSpPr>
+        <p:spPr bwMode="auto">
           <a:xfrm>
-            <a:off x="1205217" y="2379217"/>
-            <a:ext cx="608368" cy="665626"/>
+            <a:off x="1565968" y="3153034"/>
+            <a:ext cx="1919040" cy="2880320"/>
           </a:xfrm>
           <a:prstGeom prst="rect">
             <a:avLst/>
           </a:prstGeom>
-        </p:spPr>
-      </p:pic>
-      <p:sp>
-        <p:nvSpPr>
-          <p:cNvPr id="3" name="テキスト ボックス 2">
-            <a:extLst>
-              <a:ext uri="{FF2B5EF4-FFF2-40B4-BE49-F238E27FC236}">
-                <a16:creationId xmlns:a16="http://schemas.microsoft.com/office/drawing/2014/main" id="{00D6CDEB-A62F-F89D-2D65-9A90D564766E}"/>
+          <a:solidFill>
+            <a:schemeClr val="bg1"/>
+          </a:solidFill>
+          <a:ln w="12700" cap="flat" cmpd="sng" algn="ctr">
+            <a:solidFill>
+              <a:schemeClr val="tx1">
+                <a:lumMod val="75000"/>
+                <a:lumOff val="25000"/>
+              </a:schemeClr>
+            </a:solidFill>
+            <a:prstDash val="solid"/>
+            <a:round/>
+            <a:headEnd type="none" w="med" len="med"/>
+            <a:tailEnd type="none" w="med" len="med"/>
+          </a:ln>
+          <a:effectLst/>
+        </p:spPr>
+        <p:txBody>
+          <a:bodyPr vert="horz" wrap="none" lIns="90000" tIns="46800" rIns="90000" bIns="46800" numCol="1" rtlCol="0" anchor="t" anchorCtr="0" compatLnSpc="1">
+            <a:prstTxWarp prst="textNoShape">
+              <a:avLst/>
+            </a:prstTxWarp>
+          </a:bodyPr>
+          <a:lstStyle/>
+          <a:p>
+            <a:pPr defTabSz="914477" eaLnBrk="1" hangingPunct="1"/>
+            <a:r>
+              <a:rPr kumimoji="1" lang="ja-JP" altLang="en-US">
+                <a:latin typeface="BIZ UDPゴシック" panose="020B0400000000000000" pitchFamily="50" charset="-128"/>
+                <a:ea typeface="BIZ UDPゴシック" panose="020B0400000000000000" pitchFamily="50" charset="-128"/>
+              </a:rPr>
+              <a:t>表紙</a:t>
+            </a:r>
+            <a:endParaRPr kumimoji="1" lang="en-US" altLang="ja-JP">
+              <a:latin typeface="BIZ UDPゴシック" panose="020B0400000000000000" pitchFamily="50" charset="-128"/>
+              <a:ea typeface="BIZ UDPゴシック" panose="020B0400000000000000" pitchFamily="50" charset="-128"/>
+            </a:endParaRPr>
+          </a:p>
+          <a:p>
+            <a:pPr defTabSz="914477" eaLnBrk="1" hangingPunct="1"/>
+            <a:r>
+              <a:rPr kumimoji="1" lang="ja-JP" altLang="en-US">
+                <a:latin typeface="BIZ UDPゴシック" panose="020B0400000000000000" pitchFamily="50" charset="-128"/>
+                <a:ea typeface="BIZ UDPゴシック" panose="020B0400000000000000" pitchFamily="50" charset="-128"/>
+              </a:rPr>
+              <a:t>はじめに</a:t>
+            </a:r>
+            <a:endParaRPr kumimoji="1" lang="en-US" altLang="ja-JP">
+              <a:latin typeface="BIZ UDPゴシック" panose="020B0400000000000000" pitchFamily="50" charset="-128"/>
+              <a:ea typeface="BIZ UDPゴシック" panose="020B0400000000000000" pitchFamily="50" charset="-128"/>
+            </a:endParaRPr>
+          </a:p>
+          <a:p>
+            <a:pPr defTabSz="914477" eaLnBrk="1" hangingPunct="1"/>
+            <a:r>
+              <a:rPr kumimoji="1" lang="ja-JP" altLang="en-US">
+                <a:latin typeface="BIZ UDPゴシック" panose="020B0400000000000000" pitchFamily="50" charset="-128"/>
+                <a:ea typeface="BIZ UDPゴシック" panose="020B0400000000000000" pitchFamily="50" charset="-128"/>
+              </a:rPr>
+              <a:t>Ａ・・・・・</a:t>
+            </a:r>
+            <a:endParaRPr kumimoji="1" lang="en-US" altLang="ja-JP">
+              <a:latin typeface="BIZ UDPゴシック" panose="020B0400000000000000" pitchFamily="50" charset="-128"/>
+              <a:ea typeface="BIZ UDPゴシック" panose="020B0400000000000000" pitchFamily="50" charset="-128"/>
+            </a:endParaRPr>
+          </a:p>
+          <a:p>
+            <a:pPr defTabSz="914477" eaLnBrk="1" hangingPunct="1"/>
+            <a:r>
+              <a:rPr lang="ja-JP" altLang="en-US">
+                <a:latin typeface="BIZ UDPゴシック" panose="020B0400000000000000" pitchFamily="50" charset="-128"/>
+                <a:ea typeface="BIZ UDPゴシック" panose="020B0400000000000000" pitchFamily="50" charset="-128"/>
+              </a:rPr>
+              <a:t>Ｂ・・・・・</a:t>
+            </a:r>
+            <a:endParaRPr lang="en-US" altLang="ja-JP">
+              <a:latin typeface="BIZ UDPゴシック" panose="020B0400000000000000" pitchFamily="50" charset="-128"/>
+              <a:ea typeface="BIZ UDPゴシック" panose="020B0400000000000000" pitchFamily="50" charset="-128"/>
+            </a:endParaRPr>
+          </a:p>
+          <a:p>
+            <a:pPr defTabSz="914477" eaLnBrk="1" hangingPunct="1"/>
+            <a:r>
+              <a:rPr lang="en-US" altLang="ja-JP">
+                <a:latin typeface="BIZ UDPゴシック" panose="020B0400000000000000" pitchFamily="50" charset="-128"/>
+                <a:ea typeface="BIZ UDPゴシック" panose="020B0400000000000000" pitchFamily="50" charset="-128"/>
+              </a:rPr>
+              <a:t>C</a:t>
+            </a:r>
+            <a:r>
+              <a:rPr lang="ja-JP" altLang="en-US">
+                <a:latin typeface="BIZ UDPゴシック" panose="020B0400000000000000" pitchFamily="50" charset="-128"/>
+                <a:ea typeface="BIZ UDPゴシック" panose="020B0400000000000000" pitchFamily="50" charset="-128"/>
+              </a:rPr>
+              <a:t>・・・・・</a:t>
+            </a:r>
+            <a:endParaRPr lang="en-US" altLang="ja-JP">
+              <a:latin typeface="BIZ UDPゴシック" panose="020B0400000000000000" pitchFamily="50" charset="-128"/>
+              <a:ea typeface="BIZ UDPゴシック" panose="020B0400000000000000" pitchFamily="50" charset="-128"/>
+            </a:endParaRPr>
+          </a:p>
+          <a:p>
+            <a:pPr defTabSz="914477" eaLnBrk="1" hangingPunct="1"/>
+            <a:r>
+              <a:rPr lang="en-US" altLang="ja-JP">
+                <a:latin typeface="BIZ UDPゴシック" panose="020B0400000000000000" pitchFamily="50" charset="-128"/>
+                <a:ea typeface="BIZ UDPゴシック" panose="020B0400000000000000" pitchFamily="50" charset="-128"/>
+              </a:rPr>
+              <a:t>D</a:t>
+            </a:r>
+            <a:r>
+              <a:rPr lang="ja-JP" altLang="en-US">
+                <a:latin typeface="BIZ UDPゴシック" panose="020B0400000000000000" pitchFamily="50" charset="-128"/>
+                <a:ea typeface="BIZ UDPゴシック" panose="020B0400000000000000" pitchFamily="50" charset="-128"/>
+              </a:rPr>
+              <a:t>・・・・・</a:t>
+            </a:r>
+            <a:endParaRPr lang="en-US" altLang="ja-JP">
+              <a:latin typeface="BIZ UDPゴシック" panose="020B0400000000000000" pitchFamily="50" charset="-128"/>
+              <a:ea typeface="BIZ UDPゴシック" panose="020B0400000000000000" pitchFamily="50" charset="-128"/>
+            </a:endParaRPr>
+          </a:p>
+          <a:p>
+            <a:pPr defTabSz="914477" eaLnBrk="1" hangingPunct="1"/>
+            <a:r>
+              <a:rPr lang="en-US" altLang="ja-JP">
+                <a:latin typeface="BIZ UDPゴシック" panose="020B0400000000000000" pitchFamily="50" charset="-128"/>
+                <a:ea typeface="BIZ UDPゴシック" panose="020B0400000000000000" pitchFamily="50" charset="-128"/>
+              </a:rPr>
+              <a:t>E</a:t>
+            </a:r>
+            <a:r>
+              <a:rPr lang="ja-JP" altLang="en-US">
+                <a:latin typeface="BIZ UDPゴシック" panose="020B0400000000000000" pitchFamily="50" charset="-128"/>
+                <a:ea typeface="BIZ UDPゴシック" panose="020B0400000000000000" pitchFamily="50" charset="-128"/>
+              </a:rPr>
+              <a:t>・・・・・</a:t>
+            </a:r>
+            <a:endParaRPr lang="en-US" altLang="ja-JP">
+              <a:latin typeface="BIZ UDPゴシック" panose="020B0400000000000000" pitchFamily="50" charset="-128"/>
+              <a:ea typeface="BIZ UDPゴシック" panose="020B0400000000000000" pitchFamily="50" charset="-128"/>
+            </a:endParaRPr>
+          </a:p>
+          <a:p>
+            <a:pPr defTabSz="914477" eaLnBrk="1" hangingPunct="1"/>
+            <a:r>
+              <a:rPr lang="en-US" altLang="ja-JP">
+                <a:latin typeface="BIZ UDPゴシック" panose="020B0400000000000000" pitchFamily="50" charset="-128"/>
+                <a:ea typeface="BIZ UDPゴシック" panose="020B0400000000000000" pitchFamily="50" charset="-128"/>
+              </a:rPr>
+              <a:t>F</a:t>
+            </a:r>
+            <a:r>
+              <a:rPr lang="ja-JP" altLang="en-US">
+                <a:latin typeface="BIZ UDPゴシック" panose="020B0400000000000000" pitchFamily="50" charset="-128"/>
+                <a:ea typeface="BIZ UDPゴシック" panose="020B0400000000000000" pitchFamily="50" charset="-128"/>
+              </a:rPr>
+              <a:t>・・・・・</a:t>
+            </a:r>
+            <a:endParaRPr lang="en-US" altLang="ja-JP">
+              <a:latin typeface="BIZ UDPゴシック" panose="020B0400000000000000" pitchFamily="50" charset="-128"/>
+              <a:ea typeface="BIZ UDPゴシック" panose="020B0400000000000000" pitchFamily="50" charset="-128"/>
+            </a:endParaRPr>
+          </a:p>
+          <a:p>
+            <a:pPr defTabSz="914477" eaLnBrk="1" hangingPunct="1"/>
+            <a:r>
+              <a:rPr lang="en-US" altLang="ja-JP">
+                <a:latin typeface="BIZ UDPゴシック" panose="020B0400000000000000" pitchFamily="50" charset="-128"/>
+                <a:ea typeface="BIZ UDPゴシック" panose="020B0400000000000000" pitchFamily="50" charset="-128"/>
+              </a:rPr>
+              <a:t>G</a:t>
+            </a:r>
+            <a:r>
+              <a:rPr lang="ja-JP" altLang="en-US">
+                <a:latin typeface="BIZ UDPゴシック" panose="020B0400000000000000" pitchFamily="50" charset="-128"/>
+                <a:ea typeface="BIZ UDPゴシック" panose="020B0400000000000000" pitchFamily="50" charset="-128"/>
+              </a:rPr>
+              <a:t>・・・・・</a:t>
+            </a:r>
+            <a:endParaRPr lang="en-US" altLang="ja-JP">
+              <a:latin typeface="BIZ UDPゴシック" panose="020B0400000000000000" pitchFamily="50" charset="-128"/>
+              <a:ea typeface="BIZ UDPゴシック" panose="020B0400000000000000" pitchFamily="50" charset="-128"/>
+            </a:endParaRPr>
+          </a:p>
+          <a:p>
+            <a:pPr defTabSz="914477" eaLnBrk="1" hangingPunct="1"/>
+            <a:endParaRPr lang="en-US" altLang="ja-JP">
+              <a:latin typeface="BIZ UDPゴシック" panose="020B0400000000000000" pitchFamily="50" charset="-128"/>
+              <a:ea typeface="BIZ UDPゴシック" panose="020B0400000000000000" pitchFamily="50" charset="-128"/>
+            </a:endParaRPr>
+          </a:p>
+        </p:txBody>
+      </p:sp>
+      <p:cxnSp>
+        <p:nvCxnSpPr>
+          <p:cNvPr id="18" name="直線矢印コネクタ 17">
+            <a:extLst>
+              <a:ext uri="{FF2B5EF4-FFF2-40B4-BE49-F238E27FC236}">
+                <a16:creationId xmlns:a16="http://schemas.microsoft.com/office/drawing/2014/main" id="{6F349A65-F723-F9E3-89E8-1A76E3DF1828}"/>
+              </a:ext>
+            </a:extLst>
+          </p:cNvPr>
+          <p:cNvCxnSpPr>
+            <a:cxnSpLocks/>
+          </p:cNvCxnSpPr>
+          <p:nvPr/>
+        </p:nvCxnSpPr>
+        <p:spPr bwMode="auto">
+          <a:xfrm>
+            <a:off x="3701810" y="4525573"/>
+            <a:ext cx="1297996" cy="0"/>
+          </a:xfrm>
+          <a:prstGeom prst="straightConnector1">
+            <a:avLst/>
+          </a:prstGeom>
+          <a:solidFill>
+            <a:srgbClr val="CCFFFF"/>
+          </a:solidFill>
+          <a:ln w="57150" cap="flat" cmpd="sng" algn="ctr">
+            <a:solidFill>
+              <a:schemeClr val="accent2">
+                <a:lumMod val="50000"/>
+              </a:schemeClr>
+            </a:solidFill>
+            <a:prstDash val="solid"/>
+            <a:round/>
+            <a:headEnd type="none" w="med" len="med"/>
+            <a:tailEnd type="triangle"/>
+          </a:ln>
+          <a:effectLst/>
+        </p:spPr>
+      </p:cxnSp>
+      <p:sp>
+        <p:nvSpPr>
+          <p:cNvPr id="19" name="テキスト ボックス 18">
+            <a:extLst>
+              <a:ext uri="{FF2B5EF4-FFF2-40B4-BE49-F238E27FC236}">
+                <a16:creationId xmlns:a16="http://schemas.microsoft.com/office/drawing/2014/main" id="{857FD387-34F2-86F7-FE7E-853C66269119}"/>
               </a:ext>
             </a:extLst>
           </p:cNvPr>
@@ -3364,8 +3613,8 @@
         </p:nvSpPr>
         <p:spPr bwMode="auto">
           <a:xfrm>
-            <a:off x="1518731" y="2400956"/>
-            <a:ext cx="2935882" cy="646333"/>
+            <a:off x="3516844" y="3914026"/>
+            <a:ext cx="1482962" cy="523222"/>
           </a:xfrm>
           <a:prstGeom prst="rect">
             <a:avLst/>
@@ -3405,39 +3654,11 @@
           <a:p>
             <a:pPr algn="ctr" eaLnBrk="1"/>
             <a:r>
-              <a:rPr lang="ja-JP" altLang="en-US" sz="1800" kern="0">
-                <a:latin typeface="BIZ UDPゴシック" panose="020B0400000000000000" pitchFamily="50" charset="-128"/>
-                <a:ea typeface="BIZ UDPゴシック" panose="020B0400000000000000" pitchFamily="50" charset="-128"/>
-              </a:rPr>
-              <a:t>ある</a:t>
-            </a:r>
-            <a:r>
-              <a:rPr lang="en-US" altLang="ja-JP" sz="1800" kern="0">
-                <a:latin typeface="BIZ UDPゴシック" panose="020B0400000000000000" pitchFamily="50" charset="-128"/>
-                <a:ea typeface="BIZ UDPゴシック" panose="020B0400000000000000" pitchFamily="50" charset="-128"/>
-              </a:rPr>
-              <a:t>PPTX</a:t>
-            </a:r>
-            <a:r>
-              <a:rPr lang="ja-JP" altLang="en-US" sz="1800" kern="0">
-                <a:latin typeface="BIZ UDPゴシック" panose="020B0400000000000000" pitchFamily="50" charset="-128"/>
-                <a:ea typeface="BIZ UDPゴシック" panose="020B0400000000000000" pitchFamily="50" charset="-128"/>
-              </a:rPr>
-              <a:t>ファイルの</a:t>
-            </a:r>
-            <a:endParaRPr lang="en-US" altLang="ja-JP" sz="1800" kern="0">
-              <a:latin typeface="BIZ UDPゴシック" panose="020B0400000000000000" pitchFamily="50" charset="-128"/>
-              <a:ea typeface="BIZ UDPゴシック" panose="020B0400000000000000" pitchFamily="50" charset="-128"/>
-            </a:endParaRPr>
-          </a:p>
-          <a:p>
-            <a:pPr algn="ctr" eaLnBrk="1"/>
-            <a:r>
-              <a:rPr kumimoji="1" lang="ja-JP" altLang="en-US" sz="1800" kern="0">
-                <a:latin typeface="BIZ UDPゴシック" panose="020B0400000000000000" pitchFamily="50" charset="-128"/>
-                <a:ea typeface="BIZ UDPゴシック" panose="020B0400000000000000" pitchFamily="50" charset="-128"/>
-              </a:rPr>
-              <a:t>スライド一覧</a:t>
+              <a:rPr lang="ja-JP" altLang="en-US" sz="2800" kern="0">
+                <a:latin typeface="BIZ UDPゴシック" panose="020B0400000000000000" pitchFamily="50" charset="-128"/>
+                <a:ea typeface="BIZ UDPゴシック" panose="020B0400000000000000" pitchFamily="50" charset="-128"/>
+              </a:rPr>
+              <a:t>変換</a:t>
             </a:r>
             <a:endParaRPr kumimoji="1" lang="en-US" altLang="ja-JP" sz="1800" kern="0">
               <a:latin typeface="BIZ UDPゴシック" panose="020B0400000000000000" pitchFamily="50" charset="-128"/>
@@ -3446,12 +3667,42 @@
           </a:p>
         </p:txBody>
       </p:sp>
-      <p:sp>
-        <p:nvSpPr>
-          <p:cNvPr id="7" name="正方形/長方形 6">
-            <a:extLst>
-              <a:ext uri="{FF2B5EF4-FFF2-40B4-BE49-F238E27FC236}">
-                <a16:creationId xmlns:a16="http://schemas.microsoft.com/office/drawing/2014/main" id="{FAD78312-AFF6-BA37-4121-38F71316FF8E}"/>
+      <p:pic>
+        <p:nvPicPr>
+          <p:cNvPr id="21" name="図 20">
+            <a:extLst>
+              <a:ext uri="{FF2B5EF4-FFF2-40B4-BE49-F238E27FC236}">
+                <a16:creationId xmlns:a16="http://schemas.microsoft.com/office/drawing/2014/main" id="{25BE2C29-608E-EA34-EC57-7A15F64DDC4B}"/>
+              </a:ext>
+            </a:extLst>
+          </p:cNvPr>
+          <p:cNvPicPr>
+            <a:picLocks noChangeAspect="1"/>
+          </p:cNvPicPr>
+          <p:nvPr/>
+        </p:nvPicPr>
+        <p:blipFill>
+          <a:blip r:embed="rId2"/>
+          <a:stretch>
+            <a:fillRect/>
+          </a:stretch>
+        </p:blipFill>
+        <p:spPr>
+          <a:xfrm>
+            <a:off x="4785279" y="2411023"/>
+            <a:ext cx="608368" cy="665626"/>
+          </a:xfrm>
+          <a:prstGeom prst="rect">
+            <a:avLst/>
+          </a:prstGeom>
+        </p:spPr>
+      </p:pic>
+      <p:sp>
+        <p:nvSpPr>
+          <p:cNvPr id="23" name="正方形/長方形 22">
+            <a:extLst>
+              <a:ext uri="{FF2B5EF4-FFF2-40B4-BE49-F238E27FC236}">
+                <a16:creationId xmlns:a16="http://schemas.microsoft.com/office/drawing/2014/main" id="{66DA428B-79B8-6ED9-4DD4-6F447CB67E17}"/>
               </a:ext>
             </a:extLst>
           </p:cNvPr>
@@ -3460,7 +3711,7 @@
         </p:nvSpPr>
         <p:spPr bwMode="auto">
           <a:xfrm>
-            <a:off x="1565968" y="3127840"/>
+            <a:off x="5146030" y="3153034"/>
             <a:ext cx="2295576" cy="2880320"/>
           </a:xfrm>
           <a:prstGeom prst="rect">
@@ -3521,6 +3772,16 @@
           <a:p>
             <a:pPr defTabSz="914477" eaLnBrk="1" hangingPunct="1"/>
             <a:r>
+              <a:rPr kumimoji="1" lang="en-US" altLang="ja-JP">
+                <a:solidFill>
+                  <a:srgbClr val="FF0000"/>
+                </a:solidFill>
+                <a:latin typeface="BIZ UDPゴシック" panose="020B0400000000000000" pitchFamily="50" charset="-128"/>
+                <a:ea typeface="BIZ UDPゴシック" panose="020B0400000000000000" pitchFamily="50" charset="-128"/>
+              </a:rPr>
+              <a:t>1) </a:t>
+            </a:r>
+            <a:r>
               <a:rPr kumimoji="1" lang="ja-JP" altLang="en-US">
                 <a:latin typeface="BIZ UDPゴシック" panose="020B0400000000000000" pitchFamily="50" charset="-128"/>
                 <a:ea typeface="BIZ UDPゴシック" panose="020B0400000000000000" pitchFamily="50" charset="-128"/>
@@ -3535,6 +3796,16 @@
           <a:p>
             <a:pPr defTabSz="914477" eaLnBrk="1" hangingPunct="1"/>
             <a:r>
+              <a:rPr lang="en-US" altLang="ja-JP">
+                <a:solidFill>
+                  <a:srgbClr val="FF0000"/>
+                </a:solidFill>
+                <a:latin typeface="BIZ UDPゴシック" panose="020B0400000000000000" pitchFamily="50" charset="-128"/>
+                <a:ea typeface="BIZ UDPゴシック" panose="020B0400000000000000" pitchFamily="50" charset="-128"/>
+              </a:rPr>
+              <a:t>1.1) </a:t>
+            </a:r>
+            <a:r>
               <a:rPr lang="ja-JP" altLang="en-US">
                 <a:latin typeface="BIZ UDPゴシック" panose="020B0400000000000000" pitchFamily="50" charset="-128"/>
                 <a:ea typeface="BIZ UDPゴシック" panose="020B0400000000000000" pitchFamily="50" charset="-128"/>
@@ -3550,6 +3821,16 @@
             <a:pPr defTabSz="914477" eaLnBrk="1" hangingPunct="1"/>
             <a:r>
               <a:rPr lang="en-US" altLang="ja-JP">
+                <a:solidFill>
+                  <a:srgbClr val="FF0000"/>
+                </a:solidFill>
+                <a:latin typeface="BIZ UDPゴシック" panose="020B0400000000000000" pitchFamily="50" charset="-128"/>
+                <a:ea typeface="BIZ UDPゴシック" panose="020B0400000000000000" pitchFamily="50" charset="-128"/>
+              </a:rPr>
+              <a:t>1.2) </a:t>
+            </a:r>
+            <a:r>
+              <a:rPr lang="en-US" altLang="ja-JP">
                 <a:latin typeface="BIZ UDPゴシック" panose="020B0400000000000000" pitchFamily="50" charset="-128"/>
                 <a:ea typeface="BIZ UDPゴシック" panose="020B0400000000000000" pitchFamily="50" charset="-128"/>
               </a:rPr>
@@ -3571,6 +3852,16 @@
             <a:pPr defTabSz="914477" eaLnBrk="1" hangingPunct="1"/>
             <a:r>
               <a:rPr lang="en-US" altLang="ja-JP">
+                <a:solidFill>
+                  <a:srgbClr val="FF0000"/>
+                </a:solidFill>
+                <a:latin typeface="BIZ UDPゴシック" panose="020B0400000000000000" pitchFamily="50" charset="-128"/>
+                <a:ea typeface="BIZ UDPゴシック" panose="020B0400000000000000" pitchFamily="50" charset="-128"/>
+              </a:rPr>
+              <a:t>2) </a:t>
+            </a:r>
+            <a:r>
+              <a:rPr lang="en-US" altLang="ja-JP">
                 <a:latin typeface="BIZ UDPゴシック" panose="020B0400000000000000" pitchFamily="50" charset="-128"/>
                 <a:ea typeface="BIZ UDPゴシック" panose="020B0400000000000000" pitchFamily="50" charset="-128"/>
               </a:rPr>
@@ -3592,6 +3883,16 @@
             <a:pPr defTabSz="914477" eaLnBrk="1" hangingPunct="1"/>
             <a:r>
               <a:rPr lang="en-US" altLang="ja-JP">
+                <a:solidFill>
+                  <a:srgbClr val="FF0000"/>
+                </a:solidFill>
+                <a:latin typeface="BIZ UDPゴシック" panose="020B0400000000000000" pitchFamily="50" charset="-128"/>
+                <a:ea typeface="BIZ UDPゴシック" panose="020B0400000000000000" pitchFamily="50" charset="-128"/>
+              </a:rPr>
+              <a:t>2.1) </a:t>
+            </a:r>
+            <a:r>
+              <a:rPr lang="en-US" altLang="ja-JP">
                 <a:latin typeface="BIZ UDPゴシック" panose="020B0400000000000000" pitchFamily="50" charset="-128"/>
                 <a:ea typeface="BIZ UDPゴシック" panose="020B0400000000000000" pitchFamily="50" charset="-128"/>
               </a:rPr>
@@ -3613,6 +3914,16 @@
             <a:pPr defTabSz="914477" eaLnBrk="1" hangingPunct="1"/>
             <a:r>
               <a:rPr lang="en-US" altLang="ja-JP">
+                <a:solidFill>
+                  <a:srgbClr val="FF0000"/>
+                </a:solidFill>
+                <a:latin typeface="BIZ UDPゴシック" panose="020B0400000000000000" pitchFamily="50" charset="-128"/>
+                <a:ea typeface="BIZ UDPゴシック" panose="020B0400000000000000" pitchFamily="50" charset="-128"/>
+              </a:rPr>
+              <a:t>2.2) </a:t>
+            </a:r>
+            <a:r>
+              <a:rPr lang="en-US" altLang="ja-JP">
                 <a:latin typeface="BIZ UDPゴシック" panose="020B0400000000000000" pitchFamily="50" charset="-128"/>
                 <a:ea typeface="BIZ UDPゴシック" panose="020B0400000000000000" pitchFamily="50" charset="-128"/>
               </a:rPr>
@@ -3632,6 +3943,16 @@
           </a:p>
           <a:p>
             <a:pPr defTabSz="914477" eaLnBrk="1" hangingPunct="1"/>
+            <a:r>
+              <a:rPr lang="en-US" altLang="ja-JP">
+                <a:solidFill>
+                  <a:srgbClr val="FF0000"/>
+                </a:solidFill>
+                <a:latin typeface="BIZ UDPゴシック" panose="020B0400000000000000" pitchFamily="50" charset="-128"/>
+                <a:ea typeface="BIZ UDPゴシック" panose="020B0400000000000000" pitchFamily="50" charset="-128"/>
+              </a:rPr>
+              <a:t>2.3) </a:t>
+            </a:r>
             <a:r>
               <a:rPr lang="en-US" altLang="ja-JP">
                 <a:latin typeface="BIZ UDPゴシック" panose="020B0400000000000000" pitchFamily="50" charset="-128"/>
@@ -3660,100 +3981,22 @@
           </a:p>
         </p:txBody>
       </p:sp>
-      <p:cxnSp>
-        <p:nvCxnSpPr>
-          <p:cNvPr id="9" name="直線コネクタ 8">
-            <a:extLst>
-              <a:ext uri="{FF2B5EF4-FFF2-40B4-BE49-F238E27FC236}">
-                <a16:creationId xmlns:a16="http://schemas.microsoft.com/office/drawing/2014/main" id="{CF7EB0DF-645F-698E-3AED-7A00AD2C86C5}"/>
-              </a:ext>
-            </a:extLst>
-          </p:cNvPr>
-          <p:cNvCxnSpPr>
-            <a:cxnSpLocks/>
-          </p:cNvCxnSpPr>
+      <p:sp>
+        <p:nvSpPr>
+          <p:cNvPr id="25" name="テキスト ボックス 24">
+            <a:extLst>
+              <a:ext uri="{FF2B5EF4-FFF2-40B4-BE49-F238E27FC236}">
+                <a16:creationId xmlns:a16="http://schemas.microsoft.com/office/drawing/2014/main" id="{AAB0E2A2-BA02-587C-75F5-BAE2ABFE3D05}"/>
+              </a:ext>
+            </a:extLst>
+          </p:cNvPr>
+          <p:cNvSpPr txBox="1"/>
           <p:nvPr/>
-        </p:nvCxnSpPr>
+        </p:nvSpPr>
         <p:spPr bwMode="auto">
           <a:xfrm>
-            <a:off x="2711624" y="3943530"/>
-            <a:ext cx="2033928" cy="0"/>
-          </a:xfrm>
-          <a:prstGeom prst="line">
-            <a:avLst/>
-          </a:prstGeom>
-          <a:solidFill>
-            <a:srgbClr val="CCFFFF"/>
-          </a:solidFill>
-          <a:ln w="57150" cap="flat" cmpd="sng" algn="ctr">
-            <a:solidFill>
-              <a:schemeClr val="accent2">
-                <a:lumMod val="50000"/>
-              </a:schemeClr>
-            </a:solidFill>
-            <a:prstDash val="solid"/>
-            <a:round/>
-            <a:headEnd type="triangle" w="med" len="med"/>
-            <a:tailEnd type="none" w="med" len="med"/>
-          </a:ln>
-          <a:effectLst/>
-        </p:spPr>
-      </p:cxnSp>
-      <p:cxnSp>
-        <p:nvCxnSpPr>
-          <p:cNvPr id="10" name="直線コネクタ 9">
-            <a:extLst>
-              <a:ext uri="{FF2B5EF4-FFF2-40B4-BE49-F238E27FC236}">
-                <a16:creationId xmlns:a16="http://schemas.microsoft.com/office/drawing/2014/main" id="{F2B31FF7-C0DF-2E24-02D6-D25D503DDD2C}"/>
-              </a:ext>
-            </a:extLst>
-          </p:cNvPr>
-          <p:cNvCxnSpPr>
-            <a:cxnSpLocks/>
-          </p:cNvCxnSpPr>
-          <p:nvPr/>
-        </p:nvCxnSpPr>
-        <p:spPr bwMode="auto">
-          <a:xfrm>
-            <a:off x="2711624" y="4884102"/>
-            <a:ext cx="2033928" cy="0"/>
-          </a:xfrm>
-          <a:prstGeom prst="line">
-            <a:avLst/>
-          </a:prstGeom>
-          <a:solidFill>
-            <a:srgbClr val="CCFFFF"/>
-          </a:solidFill>
-          <a:ln w="57150" cap="flat" cmpd="sng" algn="ctr">
-            <a:solidFill>
-              <a:schemeClr val="accent2">
-                <a:lumMod val="50000"/>
-              </a:schemeClr>
-            </a:solidFill>
-            <a:prstDash val="solid"/>
-            <a:round/>
-            <a:headEnd type="triangle" w="med" len="med"/>
-            <a:tailEnd type="none" w="med" len="med"/>
-          </a:ln>
-          <a:effectLst/>
-        </p:spPr>
-      </p:cxnSp>
-      <p:sp>
-        <p:nvSpPr>
-          <p:cNvPr id="11" name="テキスト ボックス 10">
-            <a:extLst>
-              <a:ext uri="{FF2B5EF4-FFF2-40B4-BE49-F238E27FC236}">
-                <a16:creationId xmlns:a16="http://schemas.microsoft.com/office/drawing/2014/main" id="{9B96B976-A4BA-DB46-0ACD-E8233F89C714}"/>
-              </a:ext>
-            </a:extLst>
-          </p:cNvPr>
-          <p:cNvSpPr txBox="1"/>
-          <p:nvPr/>
-        </p:nvSpPr>
-        <p:spPr bwMode="auto">
-          <a:xfrm>
-            <a:off x="4613472" y="4699435"/>
-            <a:ext cx="1251918" cy="369334"/>
+            <a:off x="5762334" y="6022428"/>
+            <a:ext cx="4298425" cy="369334"/>
           </a:xfrm>
           <a:prstGeom prst="rect">
             <a:avLst/>
@@ -3791,15 +4034,21 @@
           </a:bodyPr>
           <a:lstStyle/>
           <a:p>
-            <a:pPr algn="ctr" eaLnBrk="1"/>
-            <a:r>
-              <a:rPr lang="ja-JP" altLang="en-US" sz="1800" kern="0">
-                <a:latin typeface="BIZ UDPゴシック" panose="020B0400000000000000" pitchFamily="50" charset="-128"/>
-                <a:ea typeface="BIZ UDPゴシック" panose="020B0400000000000000" pitchFamily="50" charset="-128"/>
-              </a:rPr>
-              <a:t>区切り</a:t>
+            <a:pPr eaLnBrk="1"/>
+            <a:r>
+              <a:rPr kumimoji="1" lang="ja-JP" altLang="en-US" sz="1800" kern="0">
+                <a:solidFill>
+                  <a:srgbClr val="FF0000"/>
+                </a:solidFill>
+                <a:latin typeface="BIZ UDPゴシック" panose="020B0400000000000000" pitchFamily="50" charset="-128"/>
+                <a:ea typeface="BIZ UDPゴシック" panose="020B0400000000000000" pitchFamily="50" charset="-128"/>
+              </a:rPr>
+              <a:t>章節番号を自動付与</a:t>
             </a:r>
             <a:endParaRPr kumimoji="1" lang="en-US" altLang="ja-JP" sz="1800" kern="0">
+              <a:solidFill>
+                <a:srgbClr val="FF0000"/>
+              </a:solidFill>
               <a:latin typeface="BIZ UDPゴシック" panose="020B0400000000000000" pitchFamily="50" charset="-128"/>
               <a:ea typeface="BIZ UDPゴシック" panose="020B0400000000000000" pitchFamily="50" charset="-128"/>
             </a:endParaRPr>
@@ -3808,10 +4057,58 @@
       </p:sp>
       <p:sp>
         <p:nvSpPr>
-          <p:cNvPr id="16" name="テキスト ボックス 15">
-            <a:extLst>
-              <a:ext uri="{FF2B5EF4-FFF2-40B4-BE49-F238E27FC236}">
-                <a16:creationId xmlns:a16="http://schemas.microsoft.com/office/drawing/2014/main" id="{AF45D073-08C9-3481-8F17-DA1C43F919BE}"/>
+          <p:cNvPr id="26" name="矢印: 下 25">
+            <a:extLst>
+              <a:ext uri="{FF2B5EF4-FFF2-40B4-BE49-F238E27FC236}">
+                <a16:creationId xmlns:a16="http://schemas.microsoft.com/office/drawing/2014/main" id="{955CB9D9-8974-78F7-3E13-38C27CF55E27}"/>
+              </a:ext>
+            </a:extLst>
+          </p:cNvPr>
+          <p:cNvSpPr/>
+          <p:nvPr/>
+        </p:nvSpPr>
+        <p:spPr bwMode="auto">
+          <a:xfrm flipV="1">
+            <a:off x="5231423" y="6086327"/>
+            <a:ext cx="530911" cy="208833"/>
+          </a:xfrm>
+          <a:prstGeom prst="downArrow">
+            <a:avLst/>
+          </a:prstGeom>
+          <a:solidFill>
+            <a:schemeClr val="accent2"/>
+          </a:solidFill>
+          <a:ln w="12700" cap="flat" cmpd="sng" algn="ctr">
+            <a:noFill/>
+            <a:prstDash val="solid"/>
+            <a:round/>
+            <a:headEnd type="none" w="med" len="med"/>
+            <a:tailEnd type="none" w="med" len="med"/>
+          </a:ln>
+          <a:effectLst/>
+        </p:spPr>
+        <p:txBody>
+          <a:bodyPr vert="horz" wrap="none" lIns="90000" tIns="46800" rIns="90000" bIns="46800" numCol="1" rtlCol="0" anchor="t" anchorCtr="0" compatLnSpc="1">
+            <a:prstTxWarp prst="textNoShape">
+              <a:avLst/>
+            </a:prstTxWarp>
+          </a:bodyPr>
+          <a:lstStyle/>
+          <a:p>
+            <a:pPr algn="ctr" defTabSz="914477" eaLnBrk="1" hangingPunct="1"/>
+            <a:endParaRPr kumimoji="1" lang="ja-JP" altLang="en-US">
+              <a:latin typeface="BIZ UDPゴシック" panose="020B0400000000000000" pitchFamily="50" charset="-128"/>
+              <a:ea typeface="BIZ UDPゴシック" panose="020B0400000000000000" pitchFamily="50" charset="-128"/>
+            </a:endParaRPr>
+          </a:p>
+        </p:txBody>
+      </p:sp>
+      <p:sp>
+        <p:nvSpPr>
+          <p:cNvPr id="8" name="テキスト ボックス 7">
+            <a:extLst>
+              <a:ext uri="{FF2B5EF4-FFF2-40B4-BE49-F238E27FC236}">
+                <a16:creationId xmlns:a16="http://schemas.microsoft.com/office/drawing/2014/main" id="{234AC7DF-62A6-2805-3447-A7EFAB458732}"/>
               </a:ext>
             </a:extLst>
           </p:cNvPr>
@@ -3820,8 +4117,8 @@
         </p:nvSpPr>
         <p:spPr bwMode="auto">
           <a:xfrm>
-            <a:off x="4253279" y="2950803"/>
-            <a:ext cx="2205772" cy="646333"/>
+            <a:off x="1203444" y="2403990"/>
+            <a:ext cx="2935882" cy="369334"/>
           </a:xfrm>
           <a:prstGeom prst="rect">
             <a:avLst/>
@@ -3861,25 +4158,11 @@
           <a:p>
             <a:pPr algn="ctr" eaLnBrk="1"/>
             <a:r>
-              <a:rPr lang="ja-JP" altLang="en-US" sz="1800" kern="0">
-                <a:latin typeface="BIZ UDPゴシック" panose="020B0400000000000000" pitchFamily="50" charset="-128"/>
-                <a:ea typeface="BIZ UDPゴシック" panose="020B0400000000000000" pitchFamily="50" charset="-128"/>
-              </a:rPr>
-              <a:t>区切りスライドを</a:t>
-            </a:r>
-            <a:endParaRPr lang="en-US" altLang="ja-JP" sz="1800" kern="0">
-              <a:latin typeface="BIZ UDPゴシック" panose="020B0400000000000000" pitchFamily="50" charset="-128"/>
-              <a:ea typeface="BIZ UDPゴシック" panose="020B0400000000000000" pitchFamily="50" charset="-128"/>
-            </a:endParaRPr>
-          </a:p>
-          <a:p>
-            <a:pPr algn="ctr" eaLnBrk="1"/>
-            <a:r>
-              <a:rPr kumimoji="1" lang="ja-JP" altLang="en-US" sz="1800" kern="0">
-                <a:latin typeface="BIZ UDPゴシック" panose="020B0400000000000000" pitchFamily="50" charset="-128"/>
-                <a:ea typeface="BIZ UDPゴシック" panose="020B0400000000000000" pitchFamily="50" charset="-128"/>
-              </a:rPr>
-              <a:t>指定して</a:t>
+              <a:rPr lang="en-US" altLang="ja-JP" sz="1800" kern="0">
+                <a:latin typeface="BIZ UDPゴシック" panose="020B0400000000000000" pitchFamily="50" charset="-128"/>
+                <a:ea typeface="BIZ UDPゴシック" panose="020B0400000000000000" pitchFamily="50" charset="-128"/>
+              </a:rPr>
+              <a:t>source.pptx</a:t>
             </a:r>
             <a:endParaRPr kumimoji="1" lang="en-US" altLang="ja-JP" sz="1800" kern="0">
               <a:latin typeface="BIZ UDPゴシック" panose="020B0400000000000000" pitchFamily="50" charset="-128"/>
@@ -3890,105 +4173,20 @@
       </p:sp>
       <p:sp>
         <p:nvSpPr>
-          <p:cNvPr id="17" name="右中かっこ 16">
-            <a:extLst>
-              <a:ext uri="{FF2B5EF4-FFF2-40B4-BE49-F238E27FC236}">
-                <a16:creationId xmlns:a16="http://schemas.microsoft.com/office/drawing/2014/main" id="{59EAA8DD-5917-1BDB-EBB3-4437213C4B33}"/>
-              </a:ext>
-            </a:extLst>
-          </p:cNvPr>
-          <p:cNvSpPr/>
+          <p:cNvPr id="20" name="テキスト ボックス 19">
+            <a:extLst>
+              <a:ext uri="{FF2B5EF4-FFF2-40B4-BE49-F238E27FC236}">
+                <a16:creationId xmlns:a16="http://schemas.microsoft.com/office/drawing/2014/main" id="{DC65A0D7-F0B6-BDFA-9759-EA5C60754294}"/>
+              </a:ext>
+            </a:extLst>
+          </p:cNvPr>
+          <p:cNvSpPr txBox="1"/>
           <p:nvPr/>
         </p:nvSpPr>
         <p:spPr bwMode="auto">
           <a:xfrm>
-            <a:off x="6528048" y="2835431"/>
-            <a:ext cx="399100" cy="3312366"/>
-          </a:xfrm>
-          <a:prstGeom prst="rightBrace">
-            <a:avLst>
-              <a:gd name="adj1" fmla="val 56454"/>
-              <a:gd name="adj2" fmla="val 50299"/>
-            </a:avLst>
-          </a:prstGeom>
-          <a:noFill/>
-          <a:ln w="57150" cap="flat" cmpd="sng" algn="ctr">
-            <a:solidFill>
-              <a:schemeClr val="accent2">
-                <a:lumMod val="50000"/>
-              </a:schemeClr>
-            </a:solidFill>
-            <a:prstDash val="solid"/>
-            <a:round/>
-            <a:headEnd type="none" w="med" len="med"/>
-            <a:tailEnd type="none" w="med" len="med"/>
-          </a:ln>
-          <a:effectLst/>
-        </p:spPr>
-        <p:txBody>
-          <a:bodyPr rtlCol="0" anchor="ctr"/>
-          <a:lstStyle/>
-          <a:p>
-            <a:pPr algn="ctr"/>
-            <a:endParaRPr kumimoji="1" lang="ja-JP" altLang="en-US"/>
-          </a:p>
-        </p:txBody>
-      </p:sp>
-      <p:cxnSp>
-        <p:nvCxnSpPr>
-          <p:cNvPr id="18" name="直線矢印コネクタ 17">
-            <a:extLst>
-              <a:ext uri="{FF2B5EF4-FFF2-40B4-BE49-F238E27FC236}">
-                <a16:creationId xmlns:a16="http://schemas.microsoft.com/office/drawing/2014/main" id="{6F349A65-F723-F9E3-89E8-1A76E3DF1828}"/>
-              </a:ext>
-            </a:extLst>
-          </p:cNvPr>
-          <p:cNvCxnSpPr>
-            <a:cxnSpLocks/>
-          </p:cNvCxnSpPr>
-          <p:nvPr/>
-        </p:nvCxnSpPr>
-        <p:spPr bwMode="auto">
-          <a:xfrm>
-            <a:off x="6948065" y="4500379"/>
-            <a:ext cx="1517475" cy="0"/>
-          </a:xfrm>
-          <a:prstGeom prst="straightConnector1">
-            <a:avLst/>
-          </a:prstGeom>
-          <a:solidFill>
-            <a:srgbClr val="CCFFFF"/>
-          </a:solidFill>
-          <a:ln w="57150" cap="flat" cmpd="sng" algn="ctr">
-            <a:solidFill>
-              <a:schemeClr val="accent2">
-                <a:lumMod val="50000"/>
-              </a:schemeClr>
-            </a:solidFill>
-            <a:prstDash val="solid"/>
-            <a:round/>
-            <a:headEnd type="none" w="med" len="med"/>
-            <a:tailEnd type="triangle"/>
-          </a:ln>
-          <a:effectLst/>
-        </p:spPr>
-      </p:cxnSp>
-      <p:sp>
-        <p:nvSpPr>
-          <p:cNvPr id="19" name="テキスト ボックス 18">
-            <a:extLst>
-              <a:ext uri="{FF2B5EF4-FFF2-40B4-BE49-F238E27FC236}">
-                <a16:creationId xmlns:a16="http://schemas.microsoft.com/office/drawing/2014/main" id="{857FD387-34F2-86F7-FE7E-853C66269119}"/>
-              </a:ext>
-            </a:extLst>
-          </p:cNvPr>
-          <p:cNvSpPr txBox="1"/>
-          <p:nvPr/>
-        </p:nvSpPr>
-        <p:spPr bwMode="auto">
-          <a:xfrm>
-            <a:off x="6818451" y="3888832"/>
-            <a:ext cx="1482962" cy="523222"/>
+            <a:off x="4709288" y="2715304"/>
+            <a:ext cx="2935882" cy="369334"/>
           </a:xfrm>
           <a:prstGeom prst="rect">
             <a:avLst/>
@@ -4028,11 +4226,11 @@
           <a:p>
             <a:pPr algn="ctr" eaLnBrk="1"/>
             <a:r>
-              <a:rPr lang="ja-JP" altLang="en-US" sz="2800" kern="0">
-                <a:latin typeface="BIZ UDPゴシック" panose="020B0400000000000000" pitchFamily="50" charset="-128"/>
-                <a:ea typeface="BIZ UDPゴシック" panose="020B0400000000000000" pitchFamily="50" charset="-128"/>
-              </a:rPr>
-              <a:t>生成</a:t>
+              <a:rPr kumimoji="1" lang="ja-JP" altLang="en-US" sz="1800" kern="0">
+                <a:latin typeface="BIZ UDPゴシック" panose="020B0400000000000000" pitchFamily="50" charset="-128"/>
+                <a:ea typeface="BIZ UDPゴシック" panose="020B0400000000000000" pitchFamily="50" charset="-128"/>
+              </a:rPr>
+              <a:t>スライド一覧</a:t>
             </a:r>
             <a:endParaRPr kumimoji="1" lang="en-US" altLang="ja-JP" sz="1800" kern="0">
               <a:latin typeface="BIZ UDPゴシック" panose="020B0400000000000000" pitchFamily="50" charset="-128"/>
@@ -4041,42 +4239,12 @@
           </a:p>
         </p:txBody>
       </p:sp>
-      <p:pic>
-        <p:nvPicPr>
-          <p:cNvPr id="21" name="図 20">
-            <a:extLst>
-              <a:ext uri="{FF2B5EF4-FFF2-40B4-BE49-F238E27FC236}">
-                <a16:creationId xmlns:a16="http://schemas.microsoft.com/office/drawing/2014/main" id="{25BE2C29-608E-EA34-EC57-7A15F64DDC4B}"/>
-              </a:ext>
-            </a:extLst>
-          </p:cNvPr>
-          <p:cNvPicPr>
-            <a:picLocks noChangeAspect="1"/>
-          </p:cNvPicPr>
-          <p:nvPr/>
-        </p:nvPicPr>
-        <p:blipFill>
-          <a:blip r:embed="rId2"/>
-          <a:stretch>
-            <a:fillRect/>
-          </a:stretch>
-        </p:blipFill>
-        <p:spPr>
-          <a:xfrm>
-            <a:off x="8237713" y="2379217"/>
-            <a:ext cx="608368" cy="665626"/>
-          </a:xfrm>
-          <a:prstGeom prst="rect">
-            <a:avLst/>
-          </a:prstGeom>
-        </p:spPr>
-      </p:pic>
-      <p:sp>
-        <p:nvSpPr>
-          <p:cNvPr id="22" name="テキスト ボックス 21">
-            <a:extLst>
-              <a:ext uri="{FF2B5EF4-FFF2-40B4-BE49-F238E27FC236}">
-                <a16:creationId xmlns:a16="http://schemas.microsoft.com/office/drawing/2014/main" id="{F20142E6-6E05-7178-9FF7-A7A6991C7A5E}"/>
+      <p:sp>
+        <p:nvSpPr>
+          <p:cNvPr id="24" name="テキスト ボックス 23">
+            <a:extLst>
+              <a:ext uri="{FF2B5EF4-FFF2-40B4-BE49-F238E27FC236}">
+                <a16:creationId xmlns:a16="http://schemas.microsoft.com/office/drawing/2014/main" id="{82A11E6F-E0D5-073A-811F-776660C2D0BB}"/>
               </a:ext>
             </a:extLst>
           </p:cNvPr>
@@ -4085,8 +4253,8 @@
         </p:nvSpPr>
         <p:spPr bwMode="auto">
           <a:xfrm>
-            <a:off x="8418436" y="2400956"/>
-            <a:ext cx="2935882" cy="646333"/>
+            <a:off x="4785279" y="2403990"/>
+            <a:ext cx="2935882" cy="369334"/>
           </a:xfrm>
           <a:prstGeom prst="rect">
             <a:avLst/>
@@ -4126,25 +4294,11 @@
           <a:p>
             <a:pPr algn="ctr" eaLnBrk="1"/>
             <a:r>
-              <a:rPr lang="ja-JP" altLang="en-US" sz="1800" kern="0">
-                <a:latin typeface="BIZ UDPゴシック" panose="020B0400000000000000" pitchFamily="50" charset="-128"/>
-                <a:ea typeface="BIZ UDPゴシック" panose="020B0400000000000000" pitchFamily="50" charset="-128"/>
-              </a:rPr>
-              <a:t>ナンバリング後の</a:t>
-            </a:r>
-            <a:endParaRPr lang="en-US" altLang="ja-JP" sz="1800" kern="0">
-              <a:latin typeface="BIZ UDPゴシック" panose="020B0400000000000000" pitchFamily="50" charset="-128"/>
-              <a:ea typeface="BIZ UDPゴシック" panose="020B0400000000000000" pitchFamily="50" charset="-128"/>
-            </a:endParaRPr>
-          </a:p>
-          <a:p>
-            <a:pPr algn="ctr" eaLnBrk="1"/>
-            <a:r>
-              <a:rPr kumimoji="1" lang="ja-JP" altLang="en-US" sz="1800" kern="0">
-                <a:latin typeface="BIZ UDPゴシック" panose="020B0400000000000000" pitchFamily="50" charset="-128"/>
-                <a:ea typeface="BIZ UDPゴシック" panose="020B0400000000000000" pitchFamily="50" charset="-128"/>
-              </a:rPr>
-              <a:t>スライド一覧</a:t>
+              <a:rPr lang="en-US" altLang="ja-JP" sz="1800" kern="0">
+                <a:latin typeface="BIZ UDPゴシック" panose="020B0400000000000000" pitchFamily="50" charset="-128"/>
+                <a:ea typeface="BIZ UDPゴシック" panose="020B0400000000000000" pitchFamily="50" charset="-128"/>
+              </a:rPr>
+              <a:t>target.pptx</a:t>
             </a:r>
             <a:endParaRPr kumimoji="1" lang="en-US" altLang="ja-JP" sz="1800" kern="0">
               <a:latin typeface="BIZ UDPゴシック" panose="020B0400000000000000" pitchFamily="50" charset="-128"/>
@@ -4155,248 +4309,20 @@
       </p:sp>
       <p:sp>
         <p:nvSpPr>
-          <p:cNvPr id="23" name="正方形/長方形 22">
-            <a:extLst>
-              <a:ext uri="{FF2B5EF4-FFF2-40B4-BE49-F238E27FC236}">
-                <a16:creationId xmlns:a16="http://schemas.microsoft.com/office/drawing/2014/main" id="{66DA428B-79B8-6ED9-4DD4-6F447CB67E17}"/>
-              </a:ext>
-            </a:extLst>
-          </p:cNvPr>
-          <p:cNvSpPr/>
+          <p:cNvPr id="28" name="テキスト ボックス 27">
+            <a:extLst>
+              <a:ext uri="{FF2B5EF4-FFF2-40B4-BE49-F238E27FC236}">
+                <a16:creationId xmlns:a16="http://schemas.microsoft.com/office/drawing/2014/main" id="{9C57E571-6E90-0A6B-8741-34D9FAB1BD1A}"/>
+              </a:ext>
+            </a:extLst>
+          </p:cNvPr>
+          <p:cNvSpPr txBox="1"/>
           <p:nvPr/>
         </p:nvSpPr>
         <p:spPr bwMode="auto">
           <a:xfrm>
-            <a:off x="8598464" y="3127840"/>
-            <a:ext cx="2295576" cy="2880320"/>
-          </a:xfrm>
-          <a:prstGeom prst="rect">
-            <a:avLst/>
-          </a:prstGeom>
-          <a:solidFill>
-            <a:schemeClr val="bg1"/>
-          </a:solidFill>
-          <a:ln w="12700" cap="flat" cmpd="sng" algn="ctr">
-            <a:solidFill>
-              <a:schemeClr val="tx1">
-                <a:lumMod val="75000"/>
-                <a:lumOff val="25000"/>
-              </a:schemeClr>
-            </a:solidFill>
-            <a:prstDash val="solid"/>
-            <a:round/>
-            <a:headEnd type="none" w="med" len="med"/>
-            <a:tailEnd type="none" w="med" len="med"/>
-          </a:ln>
-          <a:effectLst/>
-        </p:spPr>
-        <p:txBody>
-          <a:bodyPr vert="horz" wrap="none" lIns="90000" tIns="46800" rIns="90000" bIns="46800" numCol="1" rtlCol="0" anchor="t" anchorCtr="0" compatLnSpc="1">
-            <a:prstTxWarp prst="textNoShape">
-              <a:avLst/>
-            </a:prstTxWarp>
-          </a:bodyPr>
-          <a:lstStyle/>
-          <a:p>
-            <a:pPr defTabSz="914477" eaLnBrk="1" hangingPunct="1"/>
-            <a:r>
-              <a:rPr kumimoji="1" lang="ja-JP" altLang="en-US">
-                <a:latin typeface="BIZ UDPゴシック" panose="020B0400000000000000" pitchFamily="50" charset="-128"/>
-                <a:ea typeface="BIZ UDPゴシック" panose="020B0400000000000000" pitchFamily="50" charset="-128"/>
-              </a:rPr>
-              <a:t>表紙</a:t>
-            </a:r>
-            <a:endParaRPr kumimoji="1" lang="en-US" altLang="ja-JP">
-              <a:latin typeface="BIZ UDPゴシック" panose="020B0400000000000000" pitchFamily="50" charset="-128"/>
-              <a:ea typeface="BIZ UDPゴシック" panose="020B0400000000000000" pitchFamily="50" charset="-128"/>
-            </a:endParaRPr>
-          </a:p>
-          <a:p>
-            <a:pPr defTabSz="914477" eaLnBrk="1" hangingPunct="1"/>
-            <a:r>
-              <a:rPr kumimoji="1" lang="ja-JP" altLang="en-US">
-                <a:latin typeface="BIZ UDPゴシック" panose="020B0400000000000000" pitchFamily="50" charset="-128"/>
-                <a:ea typeface="BIZ UDPゴシック" panose="020B0400000000000000" pitchFamily="50" charset="-128"/>
-              </a:rPr>
-              <a:t>はじめに</a:t>
-            </a:r>
-            <a:endParaRPr kumimoji="1" lang="en-US" altLang="ja-JP">
-              <a:latin typeface="BIZ UDPゴシック" panose="020B0400000000000000" pitchFamily="50" charset="-128"/>
-              <a:ea typeface="BIZ UDPゴシック" panose="020B0400000000000000" pitchFamily="50" charset="-128"/>
-            </a:endParaRPr>
-          </a:p>
-          <a:p>
-            <a:pPr defTabSz="914477" eaLnBrk="1" hangingPunct="1"/>
-            <a:r>
-              <a:rPr kumimoji="1" lang="en-US" altLang="ja-JP">
-                <a:latin typeface="BIZ UDPゴシック" panose="020B0400000000000000" pitchFamily="50" charset="-128"/>
-                <a:ea typeface="BIZ UDPゴシック" panose="020B0400000000000000" pitchFamily="50" charset="-128"/>
-              </a:rPr>
-              <a:t>1) </a:t>
-            </a:r>
-            <a:r>
-              <a:rPr kumimoji="1" lang="ja-JP" altLang="en-US">
-                <a:latin typeface="BIZ UDPゴシック" panose="020B0400000000000000" pitchFamily="50" charset="-128"/>
-                <a:ea typeface="BIZ UDPゴシック" panose="020B0400000000000000" pitchFamily="50" charset="-128"/>
-              </a:rPr>
-              <a:t>Ａ・・・・・</a:t>
-            </a:r>
-            <a:endParaRPr kumimoji="1" lang="en-US" altLang="ja-JP">
-              <a:latin typeface="BIZ UDPゴシック" panose="020B0400000000000000" pitchFamily="50" charset="-128"/>
-              <a:ea typeface="BIZ UDPゴシック" panose="020B0400000000000000" pitchFamily="50" charset="-128"/>
-            </a:endParaRPr>
-          </a:p>
-          <a:p>
-            <a:pPr defTabSz="914477" eaLnBrk="1" hangingPunct="1"/>
-            <a:r>
-              <a:rPr lang="en-US" altLang="ja-JP">
-                <a:latin typeface="BIZ UDPゴシック" panose="020B0400000000000000" pitchFamily="50" charset="-128"/>
-                <a:ea typeface="BIZ UDPゴシック" panose="020B0400000000000000" pitchFamily="50" charset="-128"/>
-              </a:rPr>
-              <a:t>1.1) </a:t>
-            </a:r>
-            <a:r>
-              <a:rPr lang="ja-JP" altLang="en-US">
-                <a:latin typeface="BIZ UDPゴシック" panose="020B0400000000000000" pitchFamily="50" charset="-128"/>
-                <a:ea typeface="BIZ UDPゴシック" panose="020B0400000000000000" pitchFamily="50" charset="-128"/>
-              </a:rPr>
-              <a:t>Ｂ・・・・・</a:t>
-            </a:r>
-            <a:endParaRPr lang="en-US" altLang="ja-JP">
-              <a:latin typeface="BIZ UDPゴシック" panose="020B0400000000000000" pitchFamily="50" charset="-128"/>
-              <a:ea typeface="BIZ UDPゴシック" panose="020B0400000000000000" pitchFamily="50" charset="-128"/>
-            </a:endParaRPr>
-          </a:p>
-          <a:p>
-            <a:pPr defTabSz="914477" eaLnBrk="1" hangingPunct="1"/>
-            <a:r>
-              <a:rPr lang="en-US" altLang="ja-JP">
-                <a:latin typeface="BIZ UDPゴシック" panose="020B0400000000000000" pitchFamily="50" charset="-128"/>
-                <a:ea typeface="BIZ UDPゴシック" panose="020B0400000000000000" pitchFamily="50" charset="-128"/>
-              </a:rPr>
-              <a:t>1.2) C</a:t>
-            </a:r>
-            <a:r>
-              <a:rPr lang="ja-JP" altLang="en-US">
-                <a:latin typeface="BIZ UDPゴシック" panose="020B0400000000000000" pitchFamily="50" charset="-128"/>
-                <a:ea typeface="BIZ UDPゴシック" panose="020B0400000000000000" pitchFamily="50" charset="-128"/>
-              </a:rPr>
-              <a:t>・・・・・</a:t>
-            </a:r>
-            <a:endParaRPr lang="en-US" altLang="ja-JP">
-              <a:latin typeface="BIZ UDPゴシック" panose="020B0400000000000000" pitchFamily="50" charset="-128"/>
-              <a:ea typeface="BIZ UDPゴシック" panose="020B0400000000000000" pitchFamily="50" charset="-128"/>
-            </a:endParaRPr>
-          </a:p>
-          <a:p>
-            <a:pPr defTabSz="914477" eaLnBrk="1" hangingPunct="1"/>
-            <a:r>
-              <a:rPr lang="en-US" altLang="ja-JP">
-                <a:latin typeface="BIZ UDPゴシック" panose="020B0400000000000000" pitchFamily="50" charset="-128"/>
-                <a:ea typeface="BIZ UDPゴシック" panose="020B0400000000000000" pitchFamily="50" charset="-128"/>
-              </a:rPr>
-              <a:t>2) D</a:t>
-            </a:r>
-            <a:r>
-              <a:rPr lang="ja-JP" altLang="en-US">
-                <a:latin typeface="BIZ UDPゴシック" panose="020B0400000000000000" pitchFamily="50" charset="-128"/>
-                <a:ea typeface="BIZ UDPゴシック" panose="020B0400000000000000" pitchFamily="50" charset="-128"/>
-              </a:rPr>
-              <a:t>・・・・・</a:t>
-            </a:r>
-            <a:endParaRPr lang="en-US" altLang="ja-JP">
-              <a:latin typeface="BIZ UDPゴシック" panose="020B0400000000000000" pitchFamily="50" charset="-128"/>
-              <a:ea typeface="BIZ UDPゴシック" panose="020B0400000000000000" pitchFamily="50" charset="-128"/>
-            </a:endParaRPr>
-          </a:p>
-          <a:p>
-            <a:pPr defTabSz="914477" eaLnBrk="1" hangingPunct="1"/>
-            <a:r>
-              <a:rPr lang="en-US" altLang="ja-JP">
-                <a:latin typeface="BIZ UDPゴシック" panose="020B0400000000000000" pitchFamily="50" charset="-128"/>
-                <a:ea typeface="BIZ UDPゴシック" panose="020B0400000000000000" pitchFamily="50" charset="-128"/>
-              </a:rPr>
-              <a:t>2.1) E</a:t>
-            </a:r>
-            <a:r>
-              <a:rPr lang="ja-JP" altLang="en-US">
-                <a:latin typeface="BIZ UDPゴシック" panose="020B0400000000000000" pitchFamily="50" charset="-128"/>
-                <a:ea typeface="BIZ UDPゴシック" panose="020B0400000000000000" pitchFamily="50" charset="-128"/>
-              </a:rPr>
-              <a:t>・・・・・</a:t>
-            </a:r>
-            <a:endParaRPr lang="en-US" altLang="ja-JP">
-              <a:latin typeface="BIZ UDPゴシック" panose="020B0400000000000000" pitchFamily="50" charset="-128"/>
-              <a:ea typeface="BIZ UDPゴシック" panose="020B0400000000000000" pitchFamily="50" charset="-128"/>
-            </a:endParaRPr>
-          </a:p>
-          <a:p>
-            <a:pPr defTabSz="914477" eaLnBrk="1" hangingPunct="1"/>
-            <a:r>
-              <a:rPr lang="en-US" altLang="ja-JP">
-                <a:latin typeface="BIZ UDPゴシック" panose="020B0400000000000000" pitchFamily="50" charset="-128"/>
-                <a:ea typeface="BIZ UDPゴシック" panose="020B0400000000000000" pitchFamily="50" charset="-128"/>
-              </a:rPr>
-              <a:t>2.2) F</a:t>
-            </a:r>
-            <a:r>
-              <a:rPr lang="ja-JP" altLang="en-US">
-                <a:latin typeface="BIZ UDPゴシック" panose="020B0400000000000000" pitchFamily="50" charset="-128"/>
-                <a:ea typeface="BIZ UDPゴシック" panose="020B0400000000000000" pitchFamily="50" charset="-128"/>
-              </a:rPr>
-              <a:t>・・・・・</a:t>
-            </a:r>
-            <a:endParaRPr lang="en-US" altLang="ja-JP">
-              <a:latin typeface="BIZ UDPゴシック" panose="020B0400000000000000" pitchFamily="50" charset="-128"/>
-              <a:ea typeface="BIZ UDPゴシック" panose="020B0400000000000000" pitchFamily="50" charset="-128"/>
-            </a:endParaRPr>
-          </a:p>
-          <a:p>
-            <a:pPr defTabSz="914477" eaLnBrk="1" hangingPunct="1"/>
-            <a:r>
-              <a:rPr lang="en-US" altLang="ja-JP">
-                <a:latin typeface="BIZ UDPゴシック" panose="020B0400000000000000" pitchFamily="50" charset="-128"/>
-                <a:ea typeface="BIZ UDPゴシック" panose="020B0400000000000000" pitchFamily="50" charset="-128"/>
-              </a:rPr>
-              <a:t>2.3) G</a:t>
-            </a:r>
-            <a:r>
-              <a:rPr lang="ja-JP" altLang="en-US">
-                <a:latin typeface="BIZ UDPゴシック" panose="020B0400000000000000" pitchFamily="50" charset="-128"/>
-                <a:ea typeface="BIZ UDPゴシック" panose="020B0400000000000000" pitchFamily="50" charset="-128"/>
-              </a:rPr>
-              <a:t>・・・・・</a:t>
-            </a:r>
-            <a:endParaRPr lang="en-US" altLang="ja-JP">
-              <a:latin typeface="BIZ UDPゴシック" panose="020B0400000000000000" pitchFamily="50" charset="-128"/>
-              <a:ea typeface="BIZ UDPゴシック" panose="020B0400000000000000" pitchFamily="50" charset="-128"/>
-            </a:endParaRPr>
-          </a:p>
-          <a:p>
-            <a:pPr defTabSz="914477" eaLnBrk="1" hangingPunct="1"/>
-            <a:endParaRPr lang="en-US" altLang="ja-JP">
-              <a:latin typeface="BIZ UDPゴシック" panose="020B0400000000000000" pitchFamily="50" charset="-128"/>
-              <a:ea typeface="BIZ UDPゴシック" panose="020B0400000000000000" pitchFamily="50" charset="-128"/>
-            </a:endParaRPr>
-          </a:p>
-        </p:txBody>
-      </p:sp>
-      <p:sp>
-        <p:nvSpPr>
-          <p:cNvPr id="25" name="テキスト ボックス 24">
-            <a:extLst>
-              <a:ext uri="{FF2B5EF4-FFF2-40B4-BE49-F238E27FC236}">
-                <a16:creationId xmlns:a16="http://schemas.microsoft.com/office/drawing/2014/main" id="{AAB0E2A2-BA02-587C-75F5-BAE2ABFE3D05}"/>
-              </a:ext>
-            </a:extLst>
-          </p:cNvPr>
-          <p:cNvSpPr txBox="1"/>
-          <p:nvPr/>
-        </p:nvSpPr>
-        <p:spPr bwMode="auto">
-          <a:xfrm>
-            <a:off x="7559932" y="6267338"/>
-            <a:ext cx="2935882" cy="369334"/>
+            <a:off x="7752184" y="4520574"/>
+            <a:ext cx="2205772" cy="646333"/>
           </a:xfrm>
           <a:prstGeom prst="rect">
             <a:avLst/>
@@ -4436,31 +4362,39 @@
           <a:p>
             <a:pPr algn="ctr" eaLnBrk="1"/>
             <a:r>
-              <a:rPr kumimoji="1" lang="ja-JP" altLang="en-US" sz="1800" kern="0">
-                <a:solidFill>
-                  <a:srgbClr val="FF0000"/>
-                </a:solidFill>
-                <a:latin typeface="BIZ UDPゴシック" panose="020B0400000000000000" pitchFamily="50" charset="-128"/>
-                <a:ea typeface="BIZ UDPゴシック" panose="020B0400000000000000" pitchFamily="50" charset="-128"/>
-              </a:rPr>
-              <a:t>自動的に番号を振る</a:t>
-            </a:r>
-            <a:endParaRPr kumimoji="1" lang="en-US" altLang="ja-JP" sz="1800" kern="0">
-              <a:solidFill>
-                <a:srgbClr val="FF0000"/>
-              </a:solidFill>
+              <a:rPr lang="ja-JP" altLang="en-US" sz="1800" kern="0">
+                <a:latin typeface="BIZ UDPゴシック" panose="020B0400000000000000" pitchFamily="50" charset="-128"/>
+                <a:ea typeface="BIZ UDPゴシック" panose="020B0400000000000000" pitchFamily="50" charset="-128"/>
+              </a:rPr>
+              <a:t>章を単位にして</a:t>
+            </a:r>
+            <a:endParaRPr lang="en-US" altLang="ja-JP" sz="1800" kern="0">
               <a:latin typeface="BIZ UDPゴシック" panose="020B0400000000000000" pitchFamily="50" charset="-128"/>
               <a:ea typeface="BIZ UDPゴシック" panose="020B0400000000000000" pitchFamily="50" charset="-128"/>
             </a:endParaRPr>
           </a:p>
-        </p:txBody>
-      </p:sp>
-      <p:sp>
-        <p:nvSpPr>
-          <p:cNvPr id="26" name="矢印: 下 25">
-            <a:extLst>
-              <a:ext uri="{FF2B5EF4-FFF2-40B4-BE49-F238E27FC236}">
-                <a16:creationId xmlns:a16="http://schemas.microsoft.com/office/drawing/2014/main" id="{955CB9D9-8974-78F7-3E13-38C27CF55E27}"/>
+          <a:p>
+            <a:pPr algn="ctr" eaLnBrk="1"/>
+            <a:r>
+              <a:rPr lang="ja-JP" altLang="en-US" sz="1800" kern="0">
+                <a:latin typeface="BIZ UDPゴシック" panose="020B0400000000000000" pitchFamily="50" charset="-128"/>
+                <a:ea typeface="BIZ UDPゴシック" panose="020B0400000000000000" pitchFamily="50" charset="-128"/>
+              </a:rPr>
+              <a:t>ナンバリングを行う</a:t>
+            </a:r>
+            <a:endParaRPr kumimoji="1" lang="en-US" altLang="ja-JP" sz="1800" kern="0">
+              <a:latin typeface="BIZ UDPゴシック" panose="020B0400000000000000" pitchFamily="50" charset="-128"/>
+              <a:ea typeface="BIZ UDPゴシック" panose="020B0400000000000000" pitchFamily="50" charset="-128"/>
+            </a:endParaRPr>
+          </a:p>
+        </p:txBody>
+      </p:sp>
+      <p:sp>
+        <p:nvSpPr>
+          <p:cNvPr id="29" name="右中かっこ 28">
+            <a:extLst>
+              <a:ext uri="{FF2B5EF4-FFF2-40B4-BE49-F238E27FC236}">
+                <a16:creationId xmlns:a16="http://schemas.microsoft.com/office/drawing/2014/main" id="{7FF54F0F-0D63-EE23-66E3-2AC83E29CAAE}"/>
               </a:ext>
             </a:extLst>
           </p:cNvPr>
@@ -4468,18 +4402,23 @@
           <p:nvPr/>
         </p:nvSpPr>
         <p:spPr bwMode="auto">
-          <a:xfrm flipV="1">
-            <a:off x="8683857" y="6061133"/>
-            <a:ext cx="530911" cy="208833"/>
-          </a:xfrm>
-          <a:prstGeom prst="downArrow">
-            <a:avLst/>
+          <a:xfrm>
+            <a:off x="7481096" y="3858068"/>
+            <a:ext cx="244272" cy="923333"/>
+          </a:xfrm>
+          <a:prstGeom prst="rightBrace">
+            <a:avLst>
+              <a:gd name="adj1" fmla="val 56454"/>
+              <a:gd name="adj2" fmla="val 50299"/>
+            </a:avLst>
           </a:prstGeom>
-          <a:solidFill>
-            <a:schemeClr val="accent2"/>
-          </a:solidFill>
-          <a:ln w="12700" cap="flat" cmpd="sng" algn="ctr">
-            <a:noFill/>
+          <a:noFill/>
+          <a:ln w="28575" cap="flat" cmpd="sng" algn="ctr">
+            <a:solidFill>
+              <a:schemeClr val="accent2">
+                <a:lumMod val="50000"/>
+              </a:schemeClr>
+            </a:solidFill>
             <a:prstDash val="solid"/>
             <a:round/>
             <a:headEnd type="none" w="med" len="med"/>
@@ -4488,21 +4427,139 @@
           <a:effectLst/>
         </p:spPr>
         <p:txBody>
-          <a:bodyPr vert="horz" wrap="none" lIns="90000" tIns="46800" rIns="90000" bIns="46800" numCol="1" rtlCol="0" anchor="t" anchorCtr="0" compatLnSpc="1">
-            <a:prstTxWarp prst="textNoShape">
-              <a:avLst/>
-            </a:prstTxWarp>
-          </a:bodyPr>
+          <a:bodyPr rtlCol="0" anchor="ctr"/>
           <a:lstStyle/>
           <a:p>
-            <a:pPr algn="ctr" defTabSz="914477" eaLnBrk="1" hangingPunct="1"/>
-            <a:endParaRPr kumimoji="1" lang="ja-JP" altLang="en-US">
-              <a:latin typeface="BIZ UDPゴシック" panose="020B0400000000000000" pitchFamily="50" charset="-128"/>
-              <a:ea typeface="BIZ UDPゴシック" panose="020B0400000000000000" pitchFamily="50" charset="-128"/>
-            </a:endParaRPr>
-          </a:p>
-        </p:txBody>
-      </p:sp>
+            <a:pPr algn="ctr"/>
+            <a:endParaRPr kumimoji="1" lang="ja-JP" altLang="en-US"/>
+          </a:p>
+        </p:txBody>
+      </p:sp>
+      <p:sp>
+        <p:nvSpPr>
+          <p:cNvPr id="30" name="右中かっこ 29">
+            <a:extLst>
+              <a:ext uri="{FF2B5EF4-FFF2-40B4-BE49-F238E27FC236}">
+                <a16:creationId xmlns:a16="http://schemas.microsoft.com/office/drawing/2014/main" id="{FF154D9F-27F4-A4EB-C896-127A5A5DCCB7}"/>
+              </a:ext>
+            </a:extLst>
+          </p:cNvPr>
+          <p:cNvSpPr/>
+          <p:nvPr/>
+        </p:nvSpPr>
+        <p:spPr bwMode="auto">
+          <a:xfrm>
+            <a:off x="7481096" y="4852362"/>
+            <a:ext cx="244272" cy="1170066"/>
+          </a:xfrm>
+          <a:prstGeom prst="rightBrace">
+            <a:avLst>
+              <a:gd name="adj1" fmla="val 56454"/>
+              <a:gd name="adj2" fmla="val 50299"/>
+            </a:avLst>
+          </a:prstGeom>
+          <a:noFill/>
+          <a:ln w="28575" cap="flat" cmpd="sng" algn="ctr">
+            <a:solidFill>
+              <a:schemeClr val="accent2">
+                <a:lumMod val="50000"/>
+              </a:schemeClr>
+            </a:solidFill>
+            <a:prstDash val="solid"/>
+            <a:round/>
+            <a:headEnd type="none" w="med" len="med"/>
+            <a:tailEnd type="none" w="med" len="med"/>
+          </a:ln>
+          <a:effectLst/>
+        </p:spPr>
+        <p:txBody>
+          <a:bodyPr rtlCol="0" anchor="ctr"/>
+          <a:lstStyle/>
+          <a:p>
+            <a:pPr algn="ctr"/>
+            <a:endParaRPr kumimoji="1" lang="ja-JP" altLang="en-US"/>
+          </a:p>
+        </p:txBody>
+      </p:sp>
+      <p:cxnSp>
+        <p:nvCxnSpPr>
+          <p:cNvPr id="32" name="コネクタ: カギ線 31">
+            <a:extLst>
+              <a:ext uri="{FF2B5EF4-FFF2-40B4-BE49-F238E27FC236}">
+                <a16:creationId xmlns:a16="http://schemas.microsoft.com/office/drawing/2014/main" id="{F789CC69-679F-1B87-3E37-F8937ABD4052}"/>
+              </a:ext>
+            </a:extLst>
+          </p:cNvPr>
+          <p:cNvCxnSpPr>
+            <a:stCxn id="28" idx="0"/>
+          </p:cNvCxnSpPr>
+          <p:nvPr/>
+        </p:nvCxnSpPr>
+        <p:spPr bwMode="auto">
+          <a:xfrm rot="16200000" flipV="1">
+            <a:off x="8203207" y="3868711"/>
+            <a:ext cx="200840" cy="1102886"/>
+          </a:xfrm>
+          <a:prstGeom prst="bentConnector2">
+            <a:avLst/>
+          </a:prstGeom>
+          <a:solidFill>
+            <a:srgbClr val="CCFFFF"/>
+          </a:solidFill>
+          <a:ln w="28575" cap="flat" cmpd="sng" algn="ctr">
+            <a:solidFill>
+              <a:schemeClr val="accent2">
+                <a:lumMod val="50000"/>
+              </a:schemeClr>
+            </a:solidFill>
+            <a:prstDash val="solid"/>
+            <a:round/>
+            <a:headEnd type="none" w="med" len="med"/>
+            <a:tailEnd type="triangle"/>
+          </a:ln>
+          <a:effectLst/>
+        </p:spPr>
+      </p:cxnSp>
+      <p:cxnSp>
+        <p:nvCxnSpPr>
+          <p:cNvPr id="33" name="コネクタ: カギ線 32">
+            <a:extLst>
+              <a:ext uri="{FF2B5EF4-FFF2-40B4-BE49-F238E27FC236}">
+                <a16:creationId xmlns:a16="http://schemas.microsoft.com/office/drawing/2014/main" id="{7721199C-C27F-9072-8FDE-BBDF5113290C}"/>
+              </a:ext>
+            </a:extLst>
+          </p:cNvPr>
+          <p:cNvCxnSpPr>
+            <a:cxnSpLocks/>
+            <a:stCxn id="28" idx="2"/>
+          </p:cNvCxnSpPr>
+          <p:nvPr/>
+        </p:nvCxnSpPr>
+        <p:spPr bwMode="auto">
+          <a:xfrm rot="5400000">
+            <a:off x="8165419" y="4743408"/>
+            <a:ext cx="266153" cy="1113150"/>
+          </a:xfrm>
+          <a:prstGeom prst="bentConnector2">
+            <a:avLst/>
+          </a:prstGeom>
+          <a:solidFill>
+            <a:srgbClr val="CCFFFF"/>
+          </a:solidFill>
+          <a:ln w="28575" cap="flat" cmpd="sng" algn="ctr">
+            <a:solidFill>
+              <a:schemeClr val="accent2">
+                <a:lumMod val="50000"/>
+              </a:schemeClr>
+            </a:solidFill>
+            <a:prstDash val="solid"/>
+            <a:round/>
+            <a:headEnd type="none" w="med" len="med"/>
+            <a:tailEnd type="triangle"/>
+          </a:ln>
+          <a:effectLst/>
+        </p:spPr>
+      </p:cxnSp>
     </p:spTree>
     <p:extLst>
       <p:ext uri="{BB962C8B-B14F-4D97-AF65-F5344CB8AC3E}">
@@ -4562,7 +4619,7 @@
           <a:p>
             <a:r>
               <a:rPr kumimoji="1" lang="ja-JP" altLang="en-US"/>
-              <a:t>章を区切る位置がわかれば章節番号は自動計算可能</a:t>
+              <a:t>章の開始スライドがわかれば章節番号は自動計算可能</a:t>
             </a:r>
           </a:p>
         </p:txBody>
@@ -5083,7 +5140,7 @@
         <p:spPr bwMode="auto">
           <a:xfrm>
             <a:off x="1127453" y="1196752"/>
-            <a:ext cx="9577065" cy="1015665"/>
+            <a:ext cx="9577065" cy="923332"/>
           </a:xfrm>
           <a:prstGeom prst="rect">
             <a:avLst/>
@@ -5123,27 +5180,48 @@
           <a:p>
             <a:pPr eaLnBrk="1"/>
             <a:r>
-              <a:rPr lang="ja-JP" altLang="en-US" kern="0">
-                <a:latin typeface="BIZ UDPゴシック" panose="020B0400000000000000" pitchFamily="50" charset="-128"/>
-                <a:ea typeface="BIZ UDPゴシック" panose="020B0400000000000000" pitchFamily="50" charset="-128"/>
-              </a:rPr>
-              <a:t>典型的な章・節構成では、章ごとに</a:t>
-            </a:r>
-            <a:r>
-              <a:rPr lang="en-US" altLang="ja-JP" kern="0">
+              <a:rPr lang="en-US" altLang="ja-JP" sz="1800" kern="0">
+                <a:latin typeface="BIZ UDPゴシック" panose="020B0400000000000000" pitchFamily="50" charset="-128"/>
+                <a:ea typeface="BIZ UDPゴシック" panose="020B0400000000000000" pitchFamily="50" charset="-128"/>
+              </a:rPr>
+              <a:t>PowerPoint</a:t>
+            </a:r>
+            <a:r>
+              <a:rPr lang="ja-JP" altLang="en-US" sz="1800" kern="0">
+                <a:latin typeface="BIZ UDPゴシック" panose="020B0400000000000000" pitchFamily="50" charset="-128"/>
+                <a:ea typeface="BIZ UDPゴシック" panose="020B0400000000000000" pitchFamily="50" charset="-128"/>
+              </a:rPr>
+              <a:t>で章・節構成を組む場合の典型的な形式は、章ごとに章の開始を示す「章とびら」スライドを</a:t>
+            </a:r>
+            <a:r>
+              <a:rPr lang="en-US" altLang="ja-JP" sz="1800" kern="0">
                 <a:latin typeface="BIZ UDPゴシック" panose="020B0400000000000000" pitchFamily="50" charset="-128"/>
                 <a:ea typeface="BIZ UDPゴシック" panose="020B0400000000000000" pitchFamily="50" charset="-128"/>
               </a:rPr>
               <a:t>1</a:t>
             </a:r>
             <a:r>
-              <a:rPr lang="ja-JP" altLang="en-US" kern="0">
-                <a:latin typeface="BIZ UDPゴシック" panose="020B0400000000000000" pitchFamily="50" charset="-128"/>
-                <a:ea typeface="BIZ UDPゴシック" panose="020B0400000000000000" pitchFamily="50" charset="-128"/>
-              </a:rPr>
-              <a:t>枚「章とびら」を置き、その後に「節」を複数続けます。　この場合、区切りとなる「章とびら」の位置が分かれば後は自動で章節番号計算ができます。</a:t>
-            </a:r>
-            <a:endParaRPr lang="en-US" altLang="ja-JP" kern="0">
+              <a:rPr lang="ja-JP" altLang="en-US" sz="1800" kern="0">
+                <a:latin typeface="BIZ UDPゴシック" panose="020B0400000000000000" pitchFamily="50" charset="-128"/>
+                <a:ea typeface="BIZ UDPゴシック" panose="020B0400000000000000" pitchFamily="50" charset="-128"/>
+              </a:rPr>
+              <a:t>枚置き、その後に「節」を複数続けるというものです。　</a:t>
+            </a:r>
+            <a:endParaRPr lang="en-US" altLang="ja-JP" sz="1800" kern="0">
+              <a:latin typeface="BIZ UDPゴシック" panose="020B0400000000000000" pitchFamily="50" charset="-128"/>
+              <a:ea typeface="BIZ UDPゴシック" panose="020B0400000000000000" pitchFamily="50" charset="-128"/>
+            </a:endParaRPr>
+          </a:p>
+          <a:p>
+            <a:pPr eaLnBrk="1"/>
+            <a:r>
+              <a:rPr lang="ja-JP" altLang="en-US" sz="1800" kern="0">
+                <a:latin typeface="BIZ UDPゴシック" panose="020B0400000000000000" pitchFamily="50" charset="-128"/>
+                <a:ea typeface="BIZ UDPゴシック" panose="020B0400000000000000" pitchFamily="50" charset="-128"/>
+              </a:rPr>
+              <a:t>したがって、「章とびら」スライドが分かれば後は自動で章節番号計算ができます。</a:t>
+            </a:r>
+            <a:endParaRPr lang="en-US" altLang="ja-JP" sz="1800" kern="0">
               <a:latin typeface="BIZ UDPゴシック" panose="020B0400000000000000" pitchFamily="50" charset="-128"/>
               <a:ea typeface="BIZ UDPゴシック" panose="020B0400000000000000" pitchFamily="50" charset="-128"/>
             </a:endParaRPr>
@@ -5484,7 +5562,7 @@
                 <a:latin typeface="BIZ UDPゴシック" panose="020B0400000000000000" pitchFamily="50" charset="-128"/>
                 <a:ea typeface="BIZ UDPゴシック" panose="020B0400000000000000" pitchFamily="50" charset="-128"/>
               </a:rPr>
-              <a:t>「章とびら」の位置だけ</a:t>
+              <a:t>「章とびら」スライドだけ</a:t>
             </a:r>
             <a:endParaRPr kumimoji="1" lang="en-US" altLang="ja-JP">
               <a:latin typeface="BIZ UDPゴシック" panose="020B0400000000000000" pitchFamily="50" charset="-128"/>
@@ -5840,7 +5918,7 @@
         </p:nvSpPr>
         <p:spPr bwMode="auto">
           <a:xfrm>
-            <a:off x="989335" y="2339555"/>
+            <a:off x="989335" y="2476745"/>
             <a:ext cx="2016224" cy="587642"/>
           </a:xfrm>
           <a:prstGeom prst="rect">
@@ -5896,7 +5974,7 @@
         </p:nvSpPr>
         <p:spPr bwMode="auto">
           <a:xfrm>
-            <a:off x="989335" y="3036169"/>
+            <a:off x="989335" y="3173359"/>
             <a:ext cx="2016224" cy="587642"/>
           </a:xfrm>
           <a:prstGeom prst="rect">
@@ -5952,7 +6030,7 @@
         </p:nvSpPr>
         <p:spPr bwMode="auto">
           <a:xfrm>
-            <a:off x="989335" y="3732783"/>
+            <a:off x="989335" y="3869973"/>
             <a:ext cx="2016224" cy="587642"/>
           </a:xfrm>
           <a:prstGeom prst="rect">
@@ -6008,7 +6086,7 @@
         </p:nvSpPr>
         <p:spPr bwMode="auto">
           <a:xfrm>
-            <a:off x="989335" y="4429397"/>
+            <a:off x="989335" y="4566587"/>
             <a:ext cx="2016224" cy="587642"/>
           </a:xfrm>
           <a:prstGeom prst="rect">
@@ -6064,7 +6142,7 @@
         </p:nvSpPr>
         <p:spPr bwMode="auto">
           <a:xfrm>
-            <a:off x="989335" y="5126011"/>
+            <a:off x="989335" y="5263201"/>
             <a:ext cx="2016224" cy="587642"/>
           </a:xfrm>
           <a:prstGeom prst="rect">
@@ -6120,7 +6198,7 @@
         </p:nvSpPr>
         <p:spPr bwMode="auto">
           <a:xfrm>
-            <a:off x="989335" y="5822625"/>
+            <a:off x="989335" y="5959815"/>
             <a:ext cx="2016224" cy="587642"/>
           </a:xfrm>
           <a:prstGeom prst="rect">
@@ -6177,7 +6255,7 @@
         <p:spPr bwMode="auto">
           <a:xfrm>
             <a:off x="1127453" y="1196752"/>
-            <a:ext cx="9577065" cy="1015665"/>
+            <a:ext cx="9577065" cy="923332"/>
           </a:xfrm>
           <a:prstGeom prst="rect">
             <a:avLst/>
@@ -6217,55 +6295,83 @@
           <a:p>
             <a:pPr eaLnBrk="1"/>
             <a:r>
-              <a:rPr lang="ja-JP" altLang="en-US" kern="0">
+              <a:rPr lang="ja-JP" altLang="en-US" sz="1800" kern="0">
                 <a:latin typeface="BIZ UDPゴシック" panose="020B0400000000000000" pitchFamily="50" charset="-128"/>
                 <a:ea typeface="BIZ UDPゴシック" panose="020B0400000000000000" pitchFamily="50" charset="-128"/>
               </a:rPr>
               <a:t>具体的には、章とびらにあたるページのどこかに </a:t>
             </a:r>
             <a:r>
-              <a:rPr lang="en-US" altLang="ja-JP" kern="0">
+              <a:rPr lang="en-US" altLang="ja-JP" sz="1800" kern="0">
                 <a:latin typeface="BIZ UDPゴシック" panose="020B0400000000000000" pitchFamily="50" charset="-128"/>
                 <a:ea typeface="BIZ UDPゴシック" panose="020B0400000000000000" pitchFamily="50" charset="-128"/>
               </a:rPr>
               <a:t>#CHAPT# </a:t>
             </a:r>
             <a:r>
-              <a:rPr lang="ja-JP" altLang="en-US" kern="0">
-                <a:latin typeface="BIZ UDPゴシック" panose="020B0400000000000000" pitchFamily="50" charset="-128"/>
-                <a:ea typeface="BIZ UDPゴシック" panose="020B0400000000000000" pitchFamily="50" charset="-128"/>
-              </a:rPr>
-              <a:t>という特殊タグを埋め込みます。　</a:t>
-            </a:r>
-            <a:r>
-              <a:rPr lang="en-US" altLang="ja-JP" kern="0">
+              <a:rPr lang="ja-JP" altLang="en-US" sz="1800" kern="0">
+                <a:latin typeface="BIZ UDPゴシック" panose="020B0400000000000000" pitchFamily="50" charset="-128"/>
+                <a:ea typeface="BIZ UDPゴシック" panose="020B0400000000000000" pitchFamily="50" charset="-128"/>
+              </a:rPr>
+              <a:t>という特殊タグを埋め込んで</a:t>
+            </a:r>
+            <a:r>
+              <a:rPr lang="en-US" altLang="ja-JP" sz="1800" kern="0">
+                <a:latin typeface="BIZ UDPゴシック" panose="020B0400000000000000" pitchFamily="50" charset="-128"/>
+                <a:ea typeface="BIZ UDPゴシック" panose="020B0400000000000000" pitchFamily="50" charset="-128"/>
+              </a:rPr>
+              <a:t>PowerPoint</a:t>
+            </a:r>
+            <a:r>
+              <a:rPr lang="ja-JP" altLang="en-US" sz="1800" kern="0">
+                <a:latin typeface="BIZ UDPゴシック" panose="020B0400000000000000" pitchFamily="50" charset="-128"/>
+                <a:ea typeface="BIZ UDPゴシック" panose="020B0400000000000000" pitchFamily="50" charset="-128"/>
+              </a:rPr>
+              <a:t>ソースファイルを作成します。　それを変換プログラム（</a:t>
+            </a:r>
+            <a:r>
+              <a:rPr lang="en-US" altLang="ja-JP" sz="1800" kern="0">
                 <a:latin typeface="BIZ UDPゴシック" panose="020B0400000000000000" pitchFamily="50" charset="-128"/>
                 <a:ea typeface="BIZ UDPゴシック" panose="020B0400000000000000" pitchFamily="50" charset="-128"/>
               </a:rPr>
               <a:t>Python</a:t>
             </a:r>
             <a:r>
-              <a:rPr lang="ja-JP" altLang="en-US" kern="0">
-                <a:latin typeface="BIZ UDPゴシック" panose="020B0400000000000000" pitchFamily="50" charset="-128"/>
-                <a:ea typeface="BIZ UDPゴシック" panose="020B0400000000000000" pitchFamily="50" charset="-128"/>
-              </a:rPr>
-              <a:t>プログラムがそれを読んで番号を付与し、タグを消去して新しい </a:t>
-            </a:r>
-            <a:r>
-              <a:rPr lang="en-US" altLang="ja-JP" kern="0">
+              <a:rPr lang="ja-JP" altLang="en-US" sz="1800" kern="0">
+                <a:latin typeface="BIZ UDPゴシック" panose="020B0400000000000000" pitchFamily="50" charset="-128"/>
+                <a:ea typeface="BIZ UDPゴシック" panose="020B0400000000000000" pitchFamily="50" charset="-128"/>
+              </a:rPr>
+              <a:t>スクリプト</a:t>
+            </a:r>
+            <a:r>
+              <a:rPr lang="en-US" altLang="ja-JP" sz="1800" kern="0">
+                <a:latin typeface="BIZ UDPゴシック" panose="020B0400000000000000" pitchFamily="50" charset="-128"/>
+                <a:ea typeface="BIZ UDPゴシック" panose="020B0400000000000000" pitchFamily="50" charset="-128"/>
+              </a:rPr>
+              <a:t>)</a:t>
+            </a:r>
+            <a:r>
+              <a:rPr lang="ja-JP" altLang="en-US" sz="1800" kern="0">
+                <a:latin typeface="BIZ UDPゴシック" panose="020B0400000000000000" pitchFamily="50" charset="-128"/>
+                <a:ea typeface="BIZ UDPゴシック" panose="020B0400000000000000" pitchFamily="50" charset="-128"/>
+              </a:rPr>
+              <a:t>に読ませると、自動付番を行い、タグを消去して新しい </a:t>
+            </a:r>
+            <a:r>
+              <a:rPr lang="en-US" altLang="ja-JP" sz="1800" kern="0">
                 <a:latin typeface="BIZ UDPゴシック" panose="020B0400000000000000" pitchFamily="50" charset="-128"/>
                 <a:ea typeface="BIZ UDPゴシック" panose="020B0400000000000000" pitchFamily="50" charset="-128"/>
               </a:rPr>
               <a:t>PPTX </a:t>
             </a:r>
             <a:r>
-              <a:rPr lang="ja-JP" altLang="en-US" kern="0">
+              <a:rPr lang="ja-JP" altLang="en-US" sz="1800" kern="0">
                 <a:latin typeface="BIZ UDPゴシック" panose="020B0400000000000000" pitchFamily="50" charset="-128"/>
                 <a:ea typeface="BIZ UDPゴシック" panose="020B0400000000000000" pitchFamily="50" charset="-128"/>
               </a:rPr>
               <a:t>ファイルを生成します。</a:t>
             </a:r>
-            <a:endParaRPr lang="en-US" altLang="ja-JP" kern="0">
+            <a:endParaRPr lang="en-US" altLang="ja-JP" sz="1800" kern="0">
               <a:latin typeface="BIZ UDPゴシック" panose="020B0400000000000000" pitchFamily="50" charset="-128"/>
               <a:ea typeface="BIZ UDPゴシック" panose="020B0400000000000000" pitchFamily="50" charset="-128"/>
             </a:endParaRPr>
@@ -6286,7 +6392,7 @@
         </p:nvSpPr>
         <p:spPr bwMode="auto">
           <a:xfrm>
-            <a:off x="3846316" y="3429000"/>
+            <a:off x="3846316" y="3566190"/>
             <a:ext cx="3050576" cy="768223"/>
           </a:xfrm>
           <a:prstGeom prst="rect">
@@ -6356,7 +6462,7 @@
         </p:nvSpPr>
         <p:spPr bwMode="auto">
           <a:xfrm>
-            <a:off x="1807938" y="2604375"/>
+            <a:off x="1807938" y="2741565"/>
             <a:ext cx="1296144" cy="320823"/>
           </a:xfrm>
           <a:prstGeom prst="rect">
@@ -6415,7 +6521,7 @@
         </p:nvSpPr>
         <p:spPr bwMode="auto">
           <a:xfrm>
-            <a:off x="1807938" y="4697128"/>
+            <a:off x="1807938" y="4834318"/>
             <a:ext cx="1296144" cy="320823"/>
           </a:xfrm>
           <a:prstGeom prst="rect">
@@ -6474,7 +6580,7 @@
         </p:nvSpPr>
         <p:spPr bwMode="auto">
           <a:xfrm>
-            <a:off x="4117515" y="4144975"/>
+            <a:off x="4117515" y="4282165"/>
             <a:ext cx="2409939" cy="555817"/>
           </a:xfrm>
           <a:prstGeom prst="roundRect">
@@ -6552,7 +6658,7 @@
         </p:nvCxnSpPr>
         <p:spPr bwMode="auto">
           <a:xfrm>
-            <a:off x="3005559" y="2925198"/>
+            <a:off x="3005559" y="3062388"/>
             <a:ext cx="1111956" cy="1282759"/>
           </a:xfrm>
           <a:prstGeom prst="straightConnector1">
@@ -6589,7 +6695,7 @@
         </p:nvCxnSpPr>
         <p:spPr bwMode="auto">
           <a:xfrm flipV="1">
-            <a:off x="3005559" y="4593670"/>
+            <a:off x="3005559" y="4730860"/>
             <a:ext cx="1109201" cy="244070"/>
           </a:xfrm>
           <a:prstGeom prst="straightConnector1">
@@ -6624,7 +6730,7 @@
         </p:nvSpPr>
         <p:spPr bwMode="auto">
           <a:xfrm>
-            <a:off x="9290044" y="2339555"/>
+            <a:off x="9290044" y="2476745"/>
             <a:ext cx="2016224" cy="587642"/>
           </a:xfrm>
           <a:prstGeom prst="rect">
@@ -6687,7 +6793,7 @@
         </p:nvSpPr>
         <p:spPr bwMode="auto">
           <a:xfrm>
-            <a:off x="9290044" y="3036169"/>
+            <a:off x="9290044" y="3173359"/>
             <a:ext cx="2016224" cy="587642"/>
           </a:xfrm>
           <a:prstGeom prst="rect">
@@ -6750,7 +6856,7 @@
         </p:nvSpPr>
         <p:spPr bwMode="auto">
           <a:xfrm>
-            <a:off x="9290044" y="3732783"/>
+            <a:off x="9290044" y="3869973"/>
             <a:ext cx="2016224" cy="587642"/>
           </a:xfrm>
           <a:prstGeom prst="rect">
@@ -6813,7 +6919,7 @@
         </p:nvSpPr>
         <p:spPr bwMode="auto">
           <a:xfrm>
-            <a:off x="9290044" y="4429397"/>
+            <a:off x="9290044" y="4566587"/>
             <a:ext cx="2016224" cy="587642"/>
           </a:xfrm>
           <a:prstGeom prst="rect">
@@ -6876,7 +6982,7 @@
         </p:nvSpPr>
         <p:spPr bwMode="auto">
           <a:xfrm>
-            <a:off x="9290044" y="5126011"/>
+            <a:off x="9290044" y="5263201"/>
             <a:ext cx="2016224" cy="587642"/>
           </a:xfrm>
           <a:prstGeom prst="rect">
@@ -6939,7 +7045,7 @@
         </p:nvSpPr>
         <p:spPr bwMode="auto">
           <a:xfrm>
-            <a:off x="9290044" y="5822625"/>
+            <a:off x="9290044" y="5959815"/>
             <a:ext cx="2016224" cy="587642"/>
           </a:xfrm>
           <a:prstGeom prst="rect">
@@ -7004,7 +7110,7 @@
         </p:nvCxnSpPr>
         <p:spPr bwMode="auto">
           <a:xfrm>
-            <a:off x="6672064" y="4429397"/>
+            <a:off x="6672064" y="4566587"/>
             <a:ext cx="2448272" cy="0"/>
           </a:xfrm>
           <a:prstGeom prst="straightConnector1">
@@ -7039,7 +7145,7 @@
         </p:nvSpPr>
         <p:spPr bwMode="auto">
           <a:xfrm>
-            <a:off x="6903919" y="3189508"/>
+            <a:off x="6903919" y="3326698"/>
             <a:ext cx="2016224" cy="1119615"/>
           </a:xfrm>
           <a:prstGeom prst="rect">
@@ -7110,6 +7216,142 @@
               <a:t>のタグは消去する</a:t>
             </a:r>
             <a:endParaRPr kumimoji="1" lang="en-US" altLang="ja-JP" sz="1800">
+              <a:latin typeface="BIZ UDPゴシック" panose="020B0400000000000000" pitchFamily="50" charset="-128"/>
+              <a:ea typeface="BIZ UDPゴシック" panose="020B0400000000000000" pitchFamily="50" charset="-128"/>
+            </a:endParaRPr>
+          </a:p>
+        </p:txBody>
+      </p:sp>
+      <p:sp>
+        <p:nvSpPr>
+          <p:cNvPr id="6" name="テキスト ボックス 5">
+            <a:extLst>
+              <a:ext uri="{FF2B5EF4-FFF2-40B4-BE49-F238E27FC236}">
+                <a16:creationId xmlns:a16="http://schemas.microsoft.com/office/drawing/2014/main" id="{D5915F42-0E14-7C6F-A071-A8ED0E65CB90}"/>
+              </a:ext>
+            </a:extLst>
+          </p:cNvPr>
+          <p:cNvSpPr txBox="1"/>
+          <p:nvPr/>
+        </p:nvSpPr>
+        <p:spPr bwMode="auto">
+          <a:xfrm>
+            <a:off x="551384" y="2132856"/>
+            <a:ext cx="2935882" cy="369334"/>
+          </a:xfrm>
+          <a:prstGeom prst="rect">
+            <a:avLst/>
+          </a:prstGeom>
+          <a:noFill/>
+          <a:ln>
+            <a:noFill/>
+          </a:ln>
+          <a:extLst>
+            <a:ext uri="{909E8E84-426E-40DD-AFC4-6F175D3DCCD1}">
+              <a14:hiddenFill xmlns:a14="http://schemas.microsoft.com/office/drawing/2010/main">
+                <a:solidFill>
+                  <a:srgbClr val="FFFFFF"/>
+                </a:solidFill>
+              </a14:hiddenFill>
+            </a:ext>
+            <a:ext uri="{91240B29-F687-4F45-9708-019B960494DF}">
+              <a14:hiddenLine xmlns:a14="http://schemas.microsoft.com/office/drawing/2010/main" w="9525">
+                <a:solidFill>
+                  <a:srgbClr val="000000"/>
+                </a:solidFill>
+                <a:miter lim="800000"/>
+                <a:headEnd/>
+                <a:tailEnd/>
+              </a14:hiddenLine>
+            </a:ext>
+          </a:extLst>
+        </p:spPr>
+        <p:txBody>
+          <a:bodyPr vert="horz" wrap="square" lIns="91440" tIns="45721" rIns="91440" bIns="45721" numCol="1" rtlCol="0" anchor="t" anchorCtr="0" compatLnSpc="1">
+            <a:prstTxWarp prst="textNoShape">
+              <a:avLst/>
+            </a:prstTxWarp>
+            <a:spAutoFit/>
+          </a:bodyPr>
+          <a:lstStyle/>
+          <a:p>
+            <a:pPr algn="ctr" eaLnBrk="1"/>
+            <a:r>
+              <a:rPr lang="en-US" altLang="ja-JP" sz="1800" kern="0">
+                <a:latin typeface="BIZ UDPゴシック" panose="020B0400000000000000" pitchFamily="50" charset="-128"/>
+                <a:ea typeface="BIZ UDPゴシック" panose="020B0400000000000000" pitchFamily="50" charset="-128"/>
+              </a:rPr>
+              <a:t>source.pptx</a:t>
+            </a:r>
+            <a:endParaRPr kumimoji="1" lang="en-US" altLang="ja-JP" sz="1800" kern="0">
+              <a:latin typeface="BIZ UDPゴシック" panose="020B0400000000000000" pitchFamily="50" charset="-128"/>
+              <a:ea typeface="BIZ UDPゴシック" panose="020B0400000000000000" pitchFamily="50" charset="-128"/>
+            </a:endParaRPr>
+          </a:p>
+        </p:txBody>
+      </p:sp>
+      <p:sp>
+        <p:nvSpPr>
+          <p:cNvPr id="7" name="テキスト ボックス 6">
+            <a:extLst>
+              <a:ext uri="{FF2B5EF4-FFF2-40B4-BE49-F238E27FC236}">
+                <a16:creationId xmlns:a16="http://schemas.microsoft.com/office/drawing/2014/main" id="{594B61C8-2929-4AC4-C0EC-6CBECCF899C2}"/>
+              </a:ext>
+            </a:extLst>
+          </p:cNvPr>
+          <p:cNvSpPr txBox="1"/>
+          <p:nvPr/>
+        </p:nvSpPr>
+        <p:spPr bwMode="auto">
+          <a:xfrm>
+            <a:off x="8773188" y="2132856"/>
+            <a:ext cx="2935882" cy="369334"/>
+          </a:xfrm>
+          <a:prstGeom prst="rect">
+            <a:avLst/>
+          </a:prstGeom>
+          <a:noFill/>
+          <a:ln>
+            <a:noFill/>
+          </a:ln>
+          <a:extLst>
+            <a:ext uri="{909E8E84-426E-40DD-AFC4-6F175D3DCCD1}">
+              <a14:hiddenFill xmlns:a14="http://schemas.microsoft.com/office/drawing/2010/main">
+                <a:solidFill>
+                  <a:srgbClr val="FFFFFF"/>
+                </a:solidFill>
+              </a14:hiddenFill>
+            </a:ext>
+            <a:ext uri="{91240B29-F687-4F45-9708-019B960494DF}">
+              <a14:hiddenLine xmlns:a14="http://schemas.microsoft.com/office/drawing/2010/main" w="9525">
+                <a:solidFill>
+                  <a:srgbClr val="000000"/>
+                </a:solidFill>
+                <a:miter lim="800000"/>
+                <a:headEnd/>
+                <a:tailEnd/>
+              </a14:hiddenLine>
+            </a:ext>
+          </a:extLst>
+        </p:spPr>
+        <p:txBody>
+          <a:bodyPr vert="horz" wrap="square" lIns="91440" tIns="45721" rIns="91440" bIns="45721" numCol="1" rtlCol="0" anchor="t" anchorCtr="0" compatLnSpc="1">
+            <a:prstTxWarp prst="textNoShape">
+              <a:avLst/>
+            </a:prstTxWarp>
+            <a:spAutoFit/>
+          </a:bodyPr>
+          <a:lstStyle/>
+          <a:p>
+            <a:pPr algn="ctr" eaLnBrk="1"/>
+            <a:r>
+              <a:rPr lang="en-US" altLang="ja-JP" sz="1800" kern="0">
+                <a:latin typeface="BIZ UDPゴシック" panose="020B0400000000000000" pitchFamily="50" charset="-128"/>
+                <a:ea typeface="BIZ UDPゴシック" panose="020B0400000000000000" pitchFamily="50" charset="-128"/>
+              </a:rPr>
+              <a:t>target.pptx</a:t>
+            </a:r>
+            <a:endParaRPr kumimoji="1" lang="en-US" altLang="ja-JP" sz="1800" kern="0">
               <a:latin typeface="BIZ UDPゴシック" panose="020B0400000000000000" pitchFamily="50" charset="-128"/>
               <a:ea typeface="BIZ UDPゴシック" panose="020B0400000000000000" pitchFamily="50" charset="-128"/>
             </a:endParaRPr>
@@ -7598,7 +7840,7 @@
         <p:spPr bwMode="auto">
           <a:xfrm>
             <a:off x="1127453" y="1196752"/>
-            <a:ext cx="9577065" cy="707888"/>
+            <a:ext cx="9577065" cy="646333"/>
           </a:xfrm>
           <a:prstGeom prst="rect">
             <a:avLst/>
@@ -7638,41 +7880,41 @@
           <a:p>
             <a:pPr eaLnBrk="1"/>
             <a:r>
-              <a:rPr lang="ja-JP" altLang="en-US" kern="0">
+              <a:rPr lang="ja-JP" altLang="en-US" sz="1800" kern="0">
                 <a:latin typeface="BIZ UDPゴシック" panose="020B0400000000000000" pitchFamily="50" charset="-128"/>
                 <a:ea typeface="BIZ UDPゴシック" panose="020B0400000000000000" pitchFamily="50" charset="-128"/>
               </a:rPr>
               <a:t>章節構成では章とびらを使わない場合もあります。その場合、</a:t>
             </a:r>
             <a:r>
-              <a:rPr lang="en-US" altLang="ja-JP" kern="0">
+              <a:rPr lang="en-US" altLang="ja-JP" sz="1800" kern="0">
                 <a:latin typeface="BIZ UDPゴシック" panose="020B0400000000000000" pitchFamily="50" charset="-128"/>
                 <a:ea typeface="BIZ UDPゴシック" panose="020B0400000000000000" pitchFamily="50" charset="-128"/>
               </a:rPr>
               <a:t>#CHAPT# </a:t>
             </a:r>
             <a:r>
-              <a:rPr lang="ja-JP" altLang="en-US" kern="0">
+              <a:rPr lang="ja-JP" altLang="en-US" sz="1800" kern="0">
                 <a:latin typeface="BIZ UDPゴシック" panose="020B0400000000000000" pitchFamily="50" charset="-128"/>
                 <a:ea typeface="BIZ UDPゴシック" panose="020B0400000000000000" pitchFamily="50" charset="-128"/>
               </a:rPr>
               <a:t>に加えて</a:t>
             </a:r>
             <a:r>
-              <a:rPr lang="en-US" altLang="ja-JP" kern="0">
+              <a:rPr lang="en-US" altLang="ja-JP" sz="1800" kern="0">
                 <a:latin typeface="BIZ UDPゴシック" panose="020B0400000000000000" pitchFamily="50" charset="-128"/>
                 <a:ea typeface="BIZ UDPゴシック" panose="020B0400000000000000" pitchFamily="50" charset="-128"/>
               </a:rPr>
               <a:t>#SECTION# </a:t>
             </a:r>
             <a:r>
-              <a:rPr lang="ja-JP" altLang="en-US" kern="0">
+              <a:rPr lang="ja-JP" altLang="en-US" sz="1800" kern="0">
                 <a:latin typeface="BIZ UDPゴシック" panose="020B0400000000000000" pitchFamily="50" charset="-128"/>
                 <a:ea typeface="BIZ UDPゴシック" panose="020B0400000000000000" pitchFamily="50" charset="-128"/>
               </a:rPr>
               <a:t>というタグを置いてください。 </a:t>
             </a:r>
-            <a:endParaRPr lang="en-US" altLang="ja-JP" kern="0">
+            <a:endParaRPr lang="en-US" altLang="ja-JP" sz="1800" kern="0">
               <a:latin typeface="BIZ UDPゴシック" panose="020B0400000000000000" pitchFamily="50" charset="-128"/>
               <a:ea typeface="BIZ UDPゴシック" panose="020B0400000000000000" pitchFamily="50" charset="-128"/>
             </a:endParaRPr>
@@ -8547,6 +8789,142 @@
           <a:effectLst/>
         </p:spPr>
       </p:cxnSp>
+      <p:sp>
+        <p:nvSpPr>
+          <p:cNvPr id="6" name="テキスト ボックス 5">
+            <a:extLst>
+              <a:ext uri="{FF2B5EF4-FFF2-40B4-BE49-F238E27FC236}">
+                <a16:creationId xmlns:a16="http://schemas.microsoft.com/office/drawing/2014/main" id="{E95181AE-8DA7-C0CE-D1D9-6A6FEEBF6986}"/>
+              </a:ext>
+            </a:extLst>
+          </p:cNvPr>
+          <p:cNvSpPr txBox="1"/>
+          <p:nvPr/>
+        </p:nvSpPr>
+        <p:spPr bwMode="auto">
+          <a:xfrm>
+            <a:off x="1343472" y="1971955"/>
+            <a:ext cx="2935882" cy="369334"/>
+          </a:xfrm>
+          <a:prstGeom prst="rect">
+            <a:avLst/>
+          </a:prstGeom>
+          <a:noFill/>
+          <a:ln>
+            <a:noFill/>
+          </a:ln>
+          <a:extLst>
+            <a:ext uri="{909E8E84-426E-40DD-AFC4-6F175D3DCCD1}">
+              <a14:hiddenFill xmlns:a14="http://schemas.microsoft.com/office/drawing/2010/main">
+                <a:solidFill>
+                  <a:srgbClr val="FFFFFF"/>
+                </a:solidFill>
+              </a14:hiddenFill>
+            </a:ext>
+            <a:ext uri="{91240B29-F687-4F45-9708-019B960494DF}">
+              <a14:hiddenLine xmlns:a14="http://schemas.microsoft.com/office/drawing/2010/main" w="9525">
+                <a:solidFill>
+                  <a:srgbClr val="000000"/>
+                </a:solidFill>
+                <a:miter lim="800000"/>
+                <a:headEnd/>
+                <a:tailEnd/>
+              </a14:hiddenLine>
+            </a:ext>
+          </a:extLst>
+        </p:spPr>
+        <p:txBody>
+          <a:bodyPr vert="horz" wrap="square" lIns="91440" tIns="45721" rIns="91440" bIns="45721" numCol="1" rtlCol="0" anchor="t" anchorCtr="0" compatLnSpc="1">
+            <a:prstTxWarp prst="textNoShape">
+              <a:avLst/>
+            </a:prstTxWarp>
+            <a:spAutoFit/>
+          </a:bodyPr>
+          <a:lstStyle/>
+          <a:p>
+            <a:pPr algn="ctr" eaLnBrk="1"/>
+            <a:r>
+              <a:rPr lang="en-US" altLang="ja-JP" sz="1800" kern="0">
+                <a:latin typeface="BIZ UDPゴシック" panose="020B0400000000000000" pitchFamily="50" charset="-128"/>
+                <a:ea typeface="BIZ UDPゴシック" panose="020B0400000000000000" pitchFamily="50" charset="-128"/>
+              </a:rPr>
+              <a:t>source.pptx</a:t>
+            </a:r>
+            <a:endParaRPr kumimoji="1" lang="en-US" altLang="ja-JP" sz="1800" kern="0">
+              <a:latin typeface="BIZ UDPゴシック" panose="020B0400000000000000" pitchFamily="50" charset="-128"/>
+              <a:ea typeface="BIZ UDPゴシック" panose="020B0400000000000000" pitchFamily="50" charset="-128"/>
+            </a:endParaRPr>
+          </a:p>
+        </p:txBody>
+      </p:sp>
+      <p:sp>
+        <p:nvSpPr>
+          <p:cNvPr id="7" name="テキスト ボックス 6">
+            <a:extLst>
+              <a:ext uri="{FF2B5EF4-FFF2-40B4-BE49-F238E27FC236}">
+                <a16:creationId xmlns:a16="http://schemas.microsoft.com/office/drawing/2014/main" id="{E309AEA8-CED2-3A3E-62F5-484770678B4E}"/>
+              </a:ext>
+            </a:extLst>
+          </p:cNvPr>
+          <p:cNvSpPr txBox="1"/>
+          <p:nvPr/>
+        </p:nvSpPr>
+        <p:spPr bwMode="auto">
+          <a:xfrm>
+            <a:off x="6761834" y="1941890"/>
+            <a:ext cx="2935882" cy="369334"/>
+          </a:xfrm>
+          <a:prstGeom prst="rect">
+            <a:avLst/>
+          </a:prstGeom>
+          <a:noFill/>
+          <a:ln>
+            <a:noFill/>
+          </a:ln>
+          <a:extLst>
+            <a:ext uri="{909E8E84-426E-40DD-AFC4-6F175D3DCCD1}">
+              <a14:hiddenFill xmlns:a14="http://schemas.microsoft.com/office/drawing/2010/main">
+                <a:solidFill>
+                  <a:srgbClr val="FFFFFF"/>
+                </a:solidFill>
+              </a14:hiddenFill>
+            </a:ext>
+            <a:ext uri="{91240B29-F687-4F45-9708-019B960494DF}">
+              <a14:hiddenLine xmlns:a14="http://schemas.microsoft.com/office/drawing/2010/main" w="9525">
+                <a:solidFill>
+                  <a:srgbClr val="000000"/>
+                </a:solidFill>
+                <a:miter lim="800000"/>
+                <a:headEnd/>
+                <a:tailEnd/>
+              </a14:hiddenLine>
+            </a:ext>
+          </a:extLst>
+        </p:spPr>
+        <p:txBody>
+          <a:bodyPr vert="horz" wrap="square" lIns="91440" tIns="45721" rIns="91440" bIns="45721" numCol="1" rtlCol="0" anchor="t" anchorCtr="0" compatLnSpc="1">
+            <a:prstTxWarp prst="textNoShape">
+              <a:avLst/>
+            </a:prstTxWarp>
+            <a:spAutoFit/>
+          </a:bodyPr>
+          <a:lstStyle/>
+          <a:p>
+            <a:pPr algn="ctr" eaLnBrk="1"/>
+            <a:r>
+              <a:rPr lang="en-US" altLang="ja-JP" sz="1800" kern="0">
+                <a:latin typeface="BIZ UDPゴシック" panose="020B0400000000000000" pitchFamily="50" charset="-128"/>
+                <a:ea typeface="BIZ UDPゴシック" panose="020B0400000000000000" pitchFamily="50" charset="-128"/>
+              </a:rPr>
+              <a:t>target.pptx</a:t>
+            </a:r>
+            <a:endParaRPr kumimoji="1" lang="en-US" altLang="ja-JP" sz="1800" kern="0">
+              <a:latin typeface="BIZ UDPゴシック" panose="020B0400000000000000" pitchFamily="50" charset="-128"/>
+              <a:ea typeface="BIZ UDPゴシック" panose="020B0400000000000000" pitchFamily="50" charset="-128"/>
+            </a:endParaRPr>
+          </a:p>
+        </p:txBody>
+      </p:sp>
     </p:spTree>
     <p:extLst>
       <p:ext uri="{BB962C8B-B14F-4D97-AF65-F5344CB8AC3E}">
@@ -8754,8 +9132,8 @@
         </p:nvSpPr>
         <p:spPr bwMode="auto">
           <a:xfrm>
-            <a:off x="1555651" y="2399342"/>
-            <a:ext cx="8136904" cy="400112"/>
+            <a:off x="1555650" y="2198943"/>
+            <a:ext cx="8860829" cy="1015665"/>
           </a:xfrm>
           <a:prstGeom prst="rect">
             <a:avLst/>
@@ -8778,23 +9156,60 @@
           <a:p>
             <a:pPr algn="l" eaLnBrk="1"/>
             <a:r>
+              <a:rPr kumimoji="1" lang="en-US" altLang="ja-JP" kern="0">
+                <a:latin typeface="BIZ UDPゴシック" panose="020B0400000000000000" pitchFamily="50" charset="-128"/>
+                <a:ea typeface="BIZ UDPゴシック" panose="020B0400000000000000" pitchFamily="50" charset="-128"/>
+              </a:rPr>
+              <a:t>[source]</a:t>
+            </a:r>
+          </a:p>
+          <a:p>
+            <a:pPr lvl="1" eaLnBrk="1"/>
+            <a:r>
+              <a:rPr kumimoji="1" lang="en-US" altLang="ja-JP" kern="0">
+                <a:latin typeface="BIZ UDPゴシック" panose="020B0400000000000000" pitchFamily="50" charset="-128"/>
+                <a:ea typeface="BIZ UDPゴシック" panose="020B0400000000000000" pitchFamily="50" charset="-128"/>
+              </a:rPr>
+              <a:t>eample/ex1/ </a:t>
+            </a:r>
+            <a:r>
               <a:rPr kumimoji="1" lang="ja-JP" altLang="en-US" kern="0">
                 <a:latin typeface="BIZ UDPゴシック" panose="020B0400000000000000" pitchFamily="50" charset="-128"/>
                 <a:ea typeface="BIZ UDPゴシック" panose="020B0400000000000000" pitchFamily="50" charset="-128"/>
               </a:rPr>
-              <a:t>ソース　  ： </a:t>
+              <a:t>内の </a:t>
+            </a:r>
+            <a:r>
+              <a:rPr lang="en-US" altLang="ja-JP" kern="0">
+                <a:latin typeface="BIZ UDPゴシック" panose="020B0400000000000000" pitchFamily="50" charset="-128"/>
+                <a:ea typeface="BIZ UDPゴシック" panose="020B0400000000000000" pitchFamily="50" charset="-128"/>
+              </a:rPr>
+              <a:t>NN_EIsample.pptx</a:t>
+            </a:r>
+          </a:p>
+          <a:p>
+            <a:pPr lvl="1" eaLnBrk="1"/>
+            <a:r>
+              <a:rPr kumimoji="1" lang="ja-JP" altLang="en-US" kern="0">
+                <a:latin typeface="BIZ UDPゴシック" panose="020B0400000000000000" pitchFamily="50" charset="-128"/>
+                <a:ea typeface="BIZ UDPゴシック" panose="020B0400000000000000" pitchFamily="50" charset="-128"/>
+              </a:rPr>
+              <a:t>（</a:t>
             </a:r>
             <a:r>
               <a:rPr kumimoji="1" lang="en-US" altLang="ja-JP" kern="0">
                 <a:latin typeface="BIZ UDPゴシック" panose="020B0400000000000000" pitchFamily="50" charset="-128"/>
                 <a:ea typeface="BIZ UDPゴシック" panose="020B0400000000000000" pitchFamily="50" charset="-128"/>
               </a:rPr>
-              <a:t>eample/ex1/EasyIndexerSample.pptx</a:t>
-            </a:r>
-            <a:endParaRPr kumimoji="1" lang="ja-JP" altLang="en-US" kern="0">
-              <a:latin typeface="BIZ UDPゴシック" panose="020B0400000000000000" pitchFamily="50" charset="-128"/>
-              <a:ea typeface="BIZ UDPゴシック" panose="020B0400000000000000" pitchFamily="50" charset="-128"/>
-            </a:endParaRPr>
+              <a:t>NN</a:t>
+            </a:r>
+            <a:r>
+              <a:rPr kumimoji="1" lang="ja-JP" altLang="en-US" kern="0">
+                <a:latin typeface="BIZ UDPゴシック" panose="020B0400000000000000" pitchFamily="50" charset="-128"/>
+                <a:ea typeface="BIZ UDPゴシック" panose="020B0400000000000000" pitchFamily="50" charset="-128"/>
+              </a:rPr>
+              <a:t>は数字）</a:t>
+            </a:r>
           </a:p>
         </p:txBody>
       </p:sp>
@@ -8812,8 +9227,8 @@
         </p:nvSpPr>
         <p:spPr bwMode="auto">
           <a:xfrm>
-            <a:off x="1555651" y="3128705"/>
-            <a:ext cx="8136904" cy="400112"/>
+            <a:off x="1555650" y="3509253"/>
+            <a:ext cx="8860829" cy="1015665"/>
           </a:xfrm>
           <a:prstGeom prst="rect">
             <a:avLst/>
@@ -8836,23 +9251,88 @@
           <a:p>
             <a:pPr eaLnBrk="1"/>
             <a:r>
+              <a:rPr kumimoji="1" lang="en-US" altLang="ja-JP" kern="0">
+                <a:latin typeface="BIZ UDPゴシック" panose="020B0400000000000000" pitchFamily="50" charset="-128"/>
+                <a:ea typeface="BIZ UDPゴシック" panose="020B0400000000000000" pitchFamily="50" charset="-128"/>
+              </a:rPr>
+              <a:t>[target</a:t>
+            </a:r>
+            <a:r>
               <a:rPr kumimoji="1" lang="ja-JP" altLang="en-US" kern="0">
                 <a:latin typeface="BIZ UDPゴシック" panose="020B0400000000000000" pitchFamily="50" charset="-128"/>
                 <a:ea typeface="BIZ UDPゴシック" panose="020B0400000000000000" pitchFamily="50" charset="-128"/>
               </a:rPr>
-              <a:t>変換結果： </a:t>
+              <a:t> （変換結果</a:t>
             </a:r>
             <a:r>
               <a:rPr kumimoji="1" lang="en-US" altLang="ja-JP" kern="0">
                 <a:latin typeface="BIZ UDPゴシック" panose="020B0400000000000000" pitchFamily="50" charset="-128"/>
                 <a:ea typeface="BIZ UDPゴシック" panose="020B0400000000000000" pitchFamily="50" charset="-128"/>
               </a:rPr>
-              <a:t>eample/ex1/EasyIndexerSample_indexed.pptx</a:t>
-            </a:r>
-            <a:endParaRPr kumimoji="1" lang="ja-JP" altLang="en-US" kern="0">
-              <a:latin typeface="BIZ UDPゴシック" panose="020B0400000000000000" pitchFamily="50" charset="-128"/>
-              <a:ea typeface="BIZ UDPゴシック" panose="020B0400000000000000" pitchFamily="50" charset="-128"/>
-            </a:endParaRPr>
+              <a:t>)]</a:t>
+            </a:r>
+          </a:p>
+          <a:p>
+            <a:pPr lvl="1" eaLnBrk="1"/>
+            <a:r>
+              <a:rPr kumimoji="1" lang="ja-JP" altLang="en-US" kern="0">
+                <a:latin typeface="BIZ UDPゴシック" panose="020B0400000000000000" pitchFamily="50" charset="-128"/>
+                <a:ea typeface="BIZ UDPゴシック" panose="020B0400000000000000" pitchFamily="50" charset="-128"/>
+              </a:rPr>
+              <a:t>同フォルダの </a:t>
+            </a:r>
+            <a:r>
+              <a:rPr lang="en-US" altLang="ja-JP" kern="0">
+                <a:latin typeface="BIZ UDPゴシック" panose="020B0400000000000000" pitchFamily="50" charset="-128"/>
+                <a:ea typeface="BIZ UDPゴシック" panose="020B0400000000000000" pitchFamily="50" charset="-128"/>
+              </a:rPr>
+              <a:t>NN_EISamplle_generated.pptx </a:t>
+            </a:r>
+          </a:p>
+          <a:p>
+            <a:pPr lvl="1" eaLnBrk="1"/>
+            <a:r>
+              <a:rPr kumimoji="1" lang="en-US" altLang="ja-JP" kern="0">
+                <a:latin typeface="BIZ UDPゴシック" panose="020B0400000000000000" pitchFamily="50" charset="-128"/>
+                <a:ea typeface="BIZ UDPゴシック" panose="020B0400000000000000" pitchFamily="50" charset="-128"/>
+              </a:rPr>
+              <a:t>(NN</a:t>
+            </a:r>
+            <a:r>
+              <a:rPr kumimoji="1" lang="ja-JP" altLang="en-US" kern="0">
+                <a:latin typeface="BIZ UDPゴシック" panose="020B0400000000000000" pitchFamily="50" charset="-128"/>
+                <a:ea typeface="BIZ UDPゴシック" panose="020B0400000000000000" pitchFamily="50" charset="-128"/>
+              </a:rPr>
+              <a:t>は数字、</a:t>
+            </a:r>
+            <a:r>
+              <a:rPr kumimoji="1" lang="en-US" altLang="ja-JP" kern="0">
+                <a:latin typeface="BIZ UDPゴシック" panose="020B0400000000000000" pitchFamily="50" charset="-128"/>
+                <a:ea typeface="BIZ UDPゴシック" panose="020B0400000000000000" pitchFamily="50" charset="-128"/>
+              </a:rPr>
+              <a:t>trailer</a:t>
+            </a:r>
+            <a:r>
+              <a:rPr kumimoji="1" lang="ja-JP" altLang="en-US" kern="0">
+                <a:latin typeface="BIZ UDPゴシック" panose="020B0400000000000000" pitchFamily="50" charset="-128"/>
+                <a:ea typeface="BIZ UDPゴシック" panose="020B0400000000000000" pitchFamily="50" charset="-128"/>
+              </a:rPr>
+              <a:t>文字列は </a:t>
+            </a:r>
+            <a:r>
+              <a:rPr kumimoji="1" lang="en-US" altLang="ja-JP" kern="0">
+                <a:latin typeface="BIZ UDPゴシック" panose="020B0400000000000000" pitchFamily="50" charset="-128"/>
+                <a:ea typeface="BIZ UDPゴシック" panose="020B0400000000000000" pitchFamily="50" charset="-128"/>
+              </a:rPr>
+              <a:t>_generated </a:t>
+            </a:r>
+            <a:r>
+              <a:rPr kumimoji="1" lang="ja-JP" altLang="en-US" kern="0">
+                <a:latin typeface="BIZ UDPゴシック" panose="020B0400000000000000" pitchFamily="50" charset="-128"/>
+                <a:ea typeface="BIZ UDPゴシック" panose="020B0400000000000000" pitchFamily="50" charset="-128"/>
+              </a:rPr>
+              <a:t>以外の場合もあります）</a:t>
+            </a:r>
           </a:p>
         </p:txBody>
       </p:sp>
@@ -9041,13 +9521,6 @@
           <a:lstStyle/>
           <a:p>
             <a:pPr eaLnBrk="1"/>
-            <a:r>
-              <a:rPr lang="ja-JP" altLang="en-US" kern="0">
-                <a:latin typeface="BIZ UDPゴシック" panose="020B0400000000000000" pitchFamily="50" charset="-128"/>
-                <a:ea typeface="BIZ UDPゴシック" panose="020B0400000000000000" pitchFamily="50" charset="-128"/>
-              </a:rPr>
-              <a:t>同様、</a:t>
-            </a:r>
             <a:r>
               <a:rPr lang="en-US" altLang="ja-JP" kern="0">
                 <a:latin typeface="BIZ UDPゴシック" panose="020B0400000000000000" pitchFamily="50" charset="-128"/>
@@ -9558,8 +10031,8 @@
         </p:nvSpPr>
         <p:spPr bwMode="auto">
           <a:xfrm>
-            <a:off x="1555651" y="1994089"/>
-            <a:ext cx="8136904" cy="1631218"/>
+            <a:off x="1127452" y="1994089"/>
+            <a:ext cx="9865091" cy="1631218"/>
           </a:xfrm>
           <a:prstGeom prst="rect">
             <a:avLst/>
@@ -9586,68 +10059,68 @@
             <a:pPr algn="l" eaLnBrk="1"/>
             <a:r>
               <a:rPr kumimoji="1" lang="en-US" altLang="ja-JP" kern="0">
-                <a:latin typeface="BIZ UDPゴシック" panose="020B0400000000000000" pitchFamily="50" charset="-128"/>
-                <a:ea typeface="BIZ UDPゴシック" panose="020B0400000000000000" pitchFamily="50" charset="-128"/>
+                <a:latin typeface="Source Code Pro Semibold" panose="020B0609030403020204" pitchFamily="49" charset="0"/>
+                <a:ea typeface="Source Code Pro Semibold" panose="020B0609030403020204" pitchFamily="49" charset="0"/>
               </a:rPr>
               <a:t># EasyIndexer </a:t>
             </a:r>
             <a:r>
               <a:rPr kumimoji="1" lang="ja-JP" altLang="en-US" kern="0">
-                <a:latin typeface="BIZ UDPゴシック" panose="020B0400000000000000" pitchFamily="50" charset="-128"/>
+                <a:latin typeface="Source Code Pro Semibold" panose="020B0609030403020204" pitchFamily="49" charset="0"/>
                 <a:ea typeface="BIZ UDPゴシック" panose="020B0400000000000000" pitchFamily="50" charset="-128"/>
               </a:rPr>
               <a:t>起動</a:t>
             </a:r>
             <a:endParaRPr kumimoji="1" lang="en-US" altLang="ja-JP" kern="0">
-              <a:latin typeface="BIZ UDPゴシック" panose="020B0400000000000000" pitchFamily="50" charset="-128"/>
+              <a:latin typeface="Source Code Pro Semibold" panose="020B0609030403020204" pitchFamily="49" charset="0"/>
+              <a:ea typeface="Source Code Pro Semibold" panose="020B0609030403020204" pitchFamily="49" charset="0"/>
+            </a:endParaRPr>
+          </a:p>
+          <a:p>
+            <a:pPr algn="l" eaLnBrk="1"/>
+            <a:endParaRPr kumimoji="1" lang="en-US" altLang="ja-JP" kern="0">
+              <a:latin typeface="Source Code Pro Semibold" panose="020B0609030403020204" pitchFamily="49" charset="0"/>
+              <a:ea typeface="Source Code Pro Semibold" panose="020B0609030403020204" pitchFamily="49" charset="0"/>
+            </a:endParaRPr>
+          </a:p>
+          <a:p>
+            <a:pPr algn="l" eaLnBrk="1"/>
+            <a:r>
+              <a:rPr kumimoji="1" lang="en-US" altLang="ja-JP" kern="0">
+                <a:latin typeface="Source Code Pro Semibold" panose="020B0609030403020204" pitchFamily="49" charset="0"/>
+                <a:ea typeface="Source Code Pro Semibold" panose="020B0609030403020204" pitchFamily="49" charset="0"/>
+              </a:rPr>
+              <a:t>$ python  ./pptx-indexer.py   SourceFile.pptx  [OPTIONS]</a:t>
+            </a:r>
+          </a:p>
+          <a:p>
+            <a:pPr algn="l" eaLnBrk="1"/>
+            <a:endParaRPr lang="en-US" altLang="ja-JP" kern="0">
+              <a:latin typeface="Source Code Pro Semibold" panose="020B0609030403020204" pitchFamily="49" charset="0"/>
+              <a:ea typeface="Source Code Pro Semibold" panose="020B0609030403020204" pitchFamily="49" charset="0"/>
+            </a:endParaRPr>
+          </a:p>
+          <a:p>
+            <a:pPr algn="l" eaLnBrk="1"/>
+            <a:r>
+              <a:rPr kumimoji="1" lang="ja-JP" altLang="en-US" kern="0">
+                <a:latin typeface="Source Code Pro Semibold" panose="020B0609030403020204" pitchFamily="49" charset="0"/>
+                <a:ea typeface="BIZ UDPゴシック" panose="020B0400000000000000" pitchFamily="50" charset="-128"/>
+              </a:rPr>
+              <a:t>変換結果</a:t>
+            </a:r>
+            <a:r>
+              <a:rPr kumimoji="1" lang="en-US" altLang="ja-JP" kern="0">
+                <a:latin typeface="Source Code Pro Semibold" panose="020B0609030403020204" pitchFamily="49" charset="0"/>
+                <a:ea typeface="Source Code Pro Semibold" panose="020B0609030403020204" pitchFamily="49" charset="0"/>
+              </a:rPr>
+              <a:t>:  C:\Docs\SourceFile_generated.pptx</a:t>
+            </a:r>
+            <a:endParaRPr kumimoji="1" lang="ja-JP" altLang="en-US" kern="0">
+              <a:latin typeface="Source Code Pro Semibold" panose="020B0609030403020204" pitchFamily="49" charset="0"/>
               <a:ea typeface="BIZ UDPゴシック" panose="020B0400000000000000" pitchFamily="50" charset="-128"/>
             </a:endParaRPr>
           </a:p>
-          <a:p>
-            <a:pPr algn="l" eaLnBrk="1"/>
-            <a:endParaRPr kumimoji="1" lang="en-US" altLang="ja-JP" kern="0">
-              <a:latin typeface="BIZ UDPゴシック" panose="020B0400000000000000" pitchFamily="50" charset="-128"/>
-              <a:ea typeface="BIZ UDPゴシック" panose="020B0400000000000000" pitchFamily="50" charset="-128"/>
-            </a:endParaRPr>
-          </a:p>
-          <a:p>
-            <a:pPr algn="l" eaLnBrk="1"/>
-            <a:r>
-              <a:rPr kumimoji="1" lang="en-US" altLang="ja-JP" kern="0">
-                <a:latin typeface="BIZ UDPゴシック" panose="020B0400000000000000" pitchFamily="50" charset="-128"/>
-                <a:ea typeface="BIZ UDPゴシック" panose="020B0400000000000000" pitchFamily="50" charset="-128"/>
-              </a:rPr>
-              <a:t>$ python  ./PpEasyIndexer.py   TargetFile.pptx</a:t>
-            </a:r>
-          </a:p>
-          <a:p>
-            <a:pPr algn="l" eaLnBrk="1"/>
-            <a:endParaRPr lang="en-US" altLang="ja-JP" kern="0">
-              <a:latin typeface="BIZ UDPゴシック" panose="020B0400000000000000" pitchFamily="50" charset="-128"/>
-              <a:ea typeface="BIZ UDPゴシック" panose="020B0400000000000000" pitchFamily="50" charset="-128"/>
-            </a:endParaRPr>
-          </a:p>
-          <a:p>
-            <a:pPr algn="l" eaLnBrk="1"/>
-            <a:r>
-              <a:rPr kumimoji="1" lang="ja-JP" altLang="en-US" kern="0">
-                <a:latin typeface="BIZ UDPゴシック" panose="020B0400000000000000" pitchFamily="50" charset="-128"/>
-                <a:ea typeface="BIZ UDPゴシック" panose="020B0400000000000000" pitchFamily="50" charset="-128"/>
-              </a:rPr>
-              <a:t>変換結果</a:t>
-            </a:r>
-            <a:r>
-              <a:rPr kumimoji="1" lang="en-US" altLang="ja-JP" kern="0">
-                <a:latin typeface="BIZ UDPゴシック" panose="020B0400000000000000" pitchFamily="50" charset="-128"/>
-                <a:ea typeface="BIZ UDPゴシック" panose="020B0400000000000000" pitchFamily="50" charset="-128"/>
-              </a:rPr>
-              <a:t>:  C:\Docs\TargetFile_indexer.pptx</a:t>
-            </a:r>
-            <a:endParaRPr kumimoji="1" lang="ja-JP" altLang="en-US" kern="0">
-              <a:latin typeface="BIZ UDPゴシック" panose="020B0400000000000000" pitchFamily="50" charset="-128"/>
-              <a:ea typeface="BIZ UDPゴシック" panose="020B0400000000000000" pitchFamily="50" charset="-128"/>
-            </a:endParaRPr>
-          </a:p>
         </p:txBody>
       </p:sp>
       <p:sp>
@@ -9664,7 +10137,7 @@
         </p:nvSpPr>
         <p:spPr bwMode="auto">
           <a:xfrm>
-            <a:off x="2567608" y="4144591"/>
+            <a:off x="2139410" y="4144591"/>
             <a:ext cx="7920886" cy="707888"/>
           </a:xfrm>
           <a:prstGeom prst="rect">
@@ -9727,10 +10200,10 @@
             </a:r>
             <a:r>
               <a:rPr lang="en-US" altLang="ja-JP" kern="0">
-                <a:latin typeface="BIZ UDPゴシック" panose="020B0400000000000000" pitchFamily="50" charset="-128"/>
-                <a:ea typeface="BIZ UDPゴシック" panose="020B0400000000000000" pitchFamily="50" charset="-128"/>
-              </a:rPr>
-              <a:t>_indexed </a:t>
+                <a:latin typeface="Source Code Pro Semibold" panose="020B0609030403020204" pitchFamily="49" charset="0"/>
+                <a:ea typeface="Source Code Pro Semibold" panose="020B0609030403020204" pitchFamily="49" charset="0"/>
+              </a:rPr>
+              <a:t>_generated </a:t>
             </a:r>
             <a:r>
               <a:rPr lang="ja-JP" altLang="en-US" kern="0">
@@ -9760,7 +10233,7 @@
         </p:nvCxnSpPr>
         <p:spPr bwMode="auto">
           <a:xfrm>
-            <a:off x="2761785" y="3662378"/>
+            <a:off x="2593301" y="3662378"/>
             <a:ext cx="5148572" cy="0"/>
           </a:xfrm>
           <a:prstGeom prst="line">
@@ -9795,7 +10268,7 @@
         </p:nvCxnSpPr>
         <p:spPr bwMode="auto">
           <a:xfrm flipV="1">
-            <a:off x="4724003" y="3662378"/>
+            <a:off x="4295805" y="3662378"/>
             <a:ext cx="0" cy="482213"/>
           </a:xfrm>
           <a:prstGeom prst="straightConnector1">
@@ -9816,6 +10289,130 @@
           <a:effectLst/>
         </p:spPr>
       </p:cxnSp>
+      <p:sp>
+        <p:nvSpPr>
+          <p:cNvPr id="6" name="テキスト ボックス 5">
+            <a:extLst>
+              <a:ext uri="{FF2B5EF4-FFF2-40B4-BE49-F238E27FC236}">
+                <a16:creationId xmlns:a16="http://schemas.microsoft.com/office/drawing/2014/main" id="{99171C87-C78F-FD65-8B0D-C69A8BA9D74D}"/>
+              </a:ext>
+            </a:extLst>
+          </p:cNvPr>
+          <p:cNvSpPr txBox="1"/>
+          <p:nvPr/>
+        </p:nvSpPr>
+        <p:spPr bwMode="auto">
+          <a:xfrm>
+            <a:off x="2139410" y="5277514"/>
+            <a:ext cx="8709118" cy="707888"/>
+          </a:xfrm>
+          <a:prstGeom prst="rect">
+            <a:avLst/>
+          </a:prstGeom>
+          <a:noFill/>
+          <a:ln>
+            <a:noFill/>
+          </a:ln>
+          <a:extLst>
+            <a:ext uri="{909E8E84-426E-40DD-AFC4-6F175D3DCCD1}">
+              <a14:hiddenFill xmlns:a14="http://schemas.microsoft.com/office/drawing/2010/main">
+                <a:solidFill>
+                  <a:srgbClr val="FFFFFF"/>
+                </a:solidFill>
+              </a14:hiddenFill>
+            </a:ext>
+            <a:ext uri="{91240B29-F687-4F45-9708-019B960494DF}">
+              <a14:hiddenLine xmlns:a14="http://schemas.microsoft.com/office/drawing/2010/main" w="9525">
+                <a:solidFill>
+                  <a:srgbClr val="000000"/>
+                </a:solidFill>
+                <a:miter lim="800000"/>
+                <a:headEnd/>
+                <a:tailEnd/>
+              </a14:hiddenLine>
+            </a:ext>
+          </a:extLst>
+        </p:spPr>
+        <p:txBody>
+          <a:bodyPr vert="horz" wrap="square" lIns="91440" tIns="45721" rIns="91440" bIns="45721" numCol="1" rtlCol="0" anchor="t" anchorCtr="0" compatLnSpc="1">
+            <a:prstTxWarp prst="textNoShape">
+              <a:avLst/>
+            </a:prstTxWarp>
+            <a:spAutoFit/>
+          </a:bodyPr>
+          <a:lstStyle/>
+          <a:p>
+            <a:pPr eaLnBrk="1"/>
+            <a:r>
+              <a:rPr lang="en-US" altLang="ja-JP" kern="0">
+                <a:latin typeface="BIZ UDPゴシック" panose="020B0400000000000000" pitchFamily="50" charset="-128"/>
+                <a:ea typeface="BIZ UDPゴシック" panose="020B0400000000000000" pitchFamily="50" charset="-128"/>
+              </a:rPr>
+              <a:t>SourceFile.pptx </a:t>
+            </a:r>
+            <a:r>
+              <a:rPr lang="ja-JP" altLang="en-US" kern="0">
+                <a:latin typeface="BIZ UDPゴシック" panose="020B0400000000000000" pitchFamily="50" charset="-128"/>
+                <a:ea typeface="BIZ UDPゴシック" panose="020B0400000000000000" pitchFamily="50" charset="-128"/>
+              </a:rPr>
+              <a:t>には </a:t>
+            </a:r>
+            <a:r>
+              <a:rPr lang="en-US" altLang="ja-JP" kern="0">
+                <a:latin typeface="BIZ UDPゴシック" panose="020B0400000000000000" pitchFamily="50" charset="-128"/>
+                <a:ea typeface="BIZ UDPゴシック" panose="020B0400000000000000" pitchFamily="50" charset="-128"/>
+              </a:rPr>
+              <a:t>#DT# </a:t>
+            </a:r>
+            <a:r>
+              <a:rPr lang="ja-JP" altLang="en-US" kern="0">
+                <a:latin typeface="BIZ UDPゴシック" panose="020B0400000000000000" pitchFamily="50" charset="-128"/>
+                <a:ea typeface="BIZ UDPゴシック" panose="020B0400000000000000" pitchFamily="50" charset="-128"/>
+              </a:rPr>
+              <a:t>タグが含まれないようにしてください。</a:t>
+            </a:r>
+            <a:endParaRPr lang="en-US" altLang="ja-JP" kern="0">
+              <a:latin typeface="BIZ UDPゴシック" panose="020B0400000000000000" pitchFamily="50" charset="-128"/>
+              <a:ea typeface="BIZ UDPゴシック" panose="020B0400000000000000" pitchFamily="50" charset="-128"/>
+            </a:endParaRPr>
+          </a:p>
+          <a:p>
+            <a:pPr eaLnBrk="1"/>
+            <a:r>
+              <a:rPr lang="en-US" altLang="ja-JP" kern="0">
+                <a:latin typeface="BIZ UDPゴシック" panose="020B0400000000000000" pitchFamily="50" charset="-128"/>
+                <a:ea typeface="BIZ UDPゴシック" panose="020B0400000000000000" pitchFamily="50" charset="-128"/>
+              </a:rPr>
+              <a:t>#CHAPT# </a:t>
+            </a:r>
+            <a:r>
+              <a:rPr lang="ja-JP" altLang="en-US" kern="0">
+                <a:latin typeface="BIZ UDPゴシック" panose="020B0400000000000000" pitchFamily="50" charset="-128"/>
+                <a:ea typeface="BIZ UDPゴシック" panose="020B0400000000000000" pitchFamily="50" charset="-128"/>
+              </a:rPr>
+              <a:t>と </a:t>
+            </a:r>
+            <a:r>
+              <a:rPr lang="en-US" altLang="ja-JP" kern="0">
+                <a:latin typeface="BIZ UDPゴシック" panose="020B0400000000000000" pitchFamily="50" charset="-128"/>
+                <a:ea typeface="BIZ UDPゴシック" panose="020B0400000000000000" pitchFamily="50" charset="-128"/>
+              </a:rPr>
+              <a:t>#DT# </a:t>
+            </a:r>
+            <a:r>
+              <a:rPr lang="ja-JP" altLang="en-US" kern="0">
+                <a:latin typeface="BIZ UDPゴシック" panose="020B0400000000000000" pitchFamily="50" charset="-128"/>
+                <a:ea typeface="BIZ UDPゴシック" panose="020B0400000000000000" pitchFamily="50" charset="-128"/>
+              </a:rPr>
+              <a:t>の両方が含まれるとエラーになります。</a:t>
+            </a:r>
+            <a:endParaRPr lang="ja-JP" altLang="en-US" kern="0" dirty="0">
+              <a:latin typeface="BIZ UDPゴシック" panose="020B0400000000000000" pitchFamily="50" charset="-128"/>
+              <a:ea typeface="BIZ UDPゴシック" panose="020B0400000000000000" pitchFamily="50" charset="-128"/>
+            </a:endParaRPr>
+          </a:p>
+        </p:txBody>
+      </p:sp>
     </p:spTree>
     <p:extLst>
       <p:ext uri="{BB962C8B-B14F-4D97-AF65-F5344CB8AC3E}">
@@ -10066,7 +10663,7 @@
                 <a:latin typeface="BIZ UDPゴシック" panose="020B0400000000000000" pitchFamily="50" charset="-128"/>
                 <a:ea typeface="BIZ UDPゴシック" panose="020B0400000000000000" pitchFamily="50" charset="-128"/>
               </a:rPr>
-              <a:t>Kaimai Mizuhiro</a:t>
+              <a:t>Kaimai Mizuhiros</a:t>
             </a:r>
             <a:endParaRPr lang="ja-JP" altLang="en-US" dirty="0">
               <a:latin typeface="BIZ UDPゴシック" panose="020B0400000000000000" pitchFamily="50" charset="-128"/>
@@ -10118,8 +10715,8 @@
         </p:nvSpPr>
         <p:spPr bwMode="auto">
           <a:xfrm>
-            <a:off x="1127453" y="1052736"/>
-            <a:ext cx="9577065" cy="400112"/>
+            <a:off x="898657" y="1052736"/>
+            <a:ext cx="9805862" cy="400112"/>
           </a:xfrm>
           <a:prstGeom prst="rect">
             <a:avLst/>
@@ -10193,8 +10790,8 @@
         </p:nvSpPr>
         <p:spPr bwMode="auto">
           <a:xfrm>
-            <a:off x="1343472" y="1772816"/>
-            <a:ext cx="10009111" cy="4524317"/>
+            <a:off x="898656" y="1612729"/>
+            <a:ext cx="10741960" cy="4770539"/>
           </a:xfrm>
           <a:prstGeom prst="rect">
             <a:avLst/>
@@ -10217,246 +10814,246 @@
           <a:p>
             <a:pPr algn="l" eaLnBrk="1"/>
             <a:r>
-              <a:rPr kumimoji="1" lang="en-US" altLang="ja-JP" sz="1800" kern="0">
-                <a:latin typeface="BIZ UDPゴシック" panose="020B0400000000000000" pitchFamily="50" charset="-128"/>
-                <a:ea typeface="BIZ UDPゴシック" panose="020B0400000000000000" pitchFamily="50" charset="-128"/>
+              <a:rPr kumimoji="1" lang="en-US" altLang="ja-JP" sz="1600" kern="0">
+                <a:latin typeface="Source Code Pro Semibold" panose="020B0609030403020204" pitchFamily="49" charset="0"/>
+                <a:ea typeface="Source Code Pro Semibold" panose="020B0609030403020204" pitchFamily="49" charset="0"/>
               </a:rPr>
               <a:t>--skipsildes </a:t>
             </a:r>
             <a:r>
-              <a:rPr kumimoji="1" lang="ja-JP" altLang="en-US" sz="1800" kern="0">
-                <a:latin typeface="BIZ UDPゴシック" panose="020B0400000000000000" pitchFamily="50" charset="-128"/>
+              <a:rPr kumimoji="1" lang="ja-JP" altLang="en-US" sz="1600" kern="0">
+                <a:latin typeface="Source Code Pro Semibold" panose="020B0609030403020204" pitchFamily="49" charset="0"/>
                 <a:ea typeface="BIZ UDPゴシック" panose="020B0400000000000000" pitchFamily="50" charset="-128"/>
               </a:rPr>
               <a:t>または </a:t>
             </a:r>
             <a:r>
-              <a:rPr kumimoji="1" lang="en-US" altLang="ja-JP" sz="1800" kern="0">
-                <a:latin typeface="BIZ UDPゴシック" panose="020B0400000000000000" pitchFamily="50" charset="-128"/>
-                <a:ea typeface="BIZ UDPゴシック" panose="020B0400000000000000" pitchFamily="50" charset="-128"/>
+              <a:rPr kumimoji="1" lang="en-US" altLang="ja-JP" sz="1600" kern="0">
+                <a:latin typeface="Source Code Pro Semibold" panose="020B0609030403020204" pitchFamily="49" charset="0"/>
+                <a:ea typeface="Source Code Pro Semibold" panose="020B0609030403020204" pitchFamily="49" charset="0"/>
               </a:rPr>
               <a:t>-ss</a:t>
             </a:r>
             <a:r>
-              <a:rPr kumimoji="1" lang="ja-JP" altLang="en-US" sz="1800" kern="0">
-                <a:latin typeface="BIZ UDPゴシック" panose="020B0400000000000000" pitchFamily="50" charset="-128"/>
+              <a:rPr kumimoji="1" lang="ja-JP" altLang="en-US" sz="1600" kern="0">
+                <a:latin typeface="Source Code Pro Semibold" panose="020B0609030403020204" pitchFamily="49" charset="0"/>
                 <a:ea typeface="BIZ UDPゴシック" panose="020B0400000000000000" pitchFamily="50" charset="-128"/>
               </a:rPr>
               <a:t>　　ファイル先頭からの指定したページ数、処理を飛ばします</a:t>
             </a:r>
-            <a:endParaRPr kumimoji="1" lang="en-US" altLang="ja-JP" sz="1800" kern="0">
-              <a:latin typeface="BIZ UDPゴシック" panose="020B0400000000000000" pitchFamily="50" charset="-128"/>
-              <a:ea typeface="BIZ UDPゴシック" panose="020B0400000000000000" pitchFamily="50" charset="-128"/>
+            <a:endParaRPr kumimoji="1" lang="en-US" altLang="ja-JP" sz="1600" kern="0">
+              <a:latin typeface="Source Code Pro Semibold" panose="020B0609030403020204" pitchFamily="49" charset="0"/>
+              <a:ea typeface="Source Code Pro Semibold" panose="020B0609030403020204" pitchFamily="49" charset="0"/>
             </a:endParaRPr>
           </a:p>
           <a:p>
             <a:pPr algn="l" eaLnBrk="1"/>
             <a:r>
-              <a:rPr kumimoji="1" lang="ja-JP" altLang="en-US" sz="1800" kern="0">
-                <a:latin typeface="BIZ UDPゴシック" panose="020B0400000000000000" pitchFamily="50" charset="-128"/>
+              <a:rPr kumimoji="1" lang="ja-JP" altLang="en-US" sz="1600" kern="0">
+                <a:latin typeface="Source Code Pro Semibold" panose="020B0609030403020204" pitchFamily="49" charset="0"/>
                 <a:ea typeface="BIZ UDPゴシック" panose="020B0400000000000000" pitchFamily="50" charset="-128"/>
               </a:rPr>
               <a:t>　例： </a:t>
             </a:r>
             <a:r>
-              <a:rPr lang="en-US" altLang="ja-JP" sz="1800" kern="0">
-                <a:latin typeface="BIZ UDPゴシック" panose="020B0400000000000000" pitchFamily="50" charset="-128"/>
-                <a:ea typeface="BIZ UDPゴシック" panose="020B0400000000000000" pitchFamily="50" charset="-128"/>
+              <a:rPr lang="en-US" altLang="ja-JP" sz="1600" kern="0">
+                <a:latin typeface="Source Code Pro Semibold" panose="020B0609030403020204" pitchFamily="49" charset="0"/>
+                <a:ea typeface="Source Code Pro Semibold" panose="020B0609030403020204" pitchFamily="49" charset="0"/>
               </a:rPr>
               <a:t>-ss 3</a:t>
             </a:r>
-            <a:endParaRPr kumimoji="1" lang="en-US" altLang="ja-JP" sz="1800" kern="0">
-              <a:latin typeface="BIZ UDPゴシック" panose="020B0400000000000000" pitchFamily="50" charset="-128"/>
-              <a:ea typeface="BIZ UDPゴシック" panose="020B0400000000000000" pitchFamily="50" charset="-128"/>
+            <a:endParaRPr kumimoji="1" lang="en-US" altLang="ja-JP" sz="1600" kern="0">
+              <a:latin typeface="Source Code Pro Semibold" panose="020B0609030403020204" pitchFamily="49" charset="0"/>
+              <a:ea typeface="Source Code Pro Semibold" panose="020B0609030403020204" pitchFamily="49" charset="0"/>
             </a:endParaRPr>
           </a:p>
           <a:p>
             <a:pPr algn="l" eaLnBrk="1"/>
-            <a:endParaRPr lang="en-US" altLang="ja-JP" sz="1800" kern="0">
-              <a:latin typeface="BIZ UDPゴシック" panose="020B0400000000000000" pitchFamily="50" charset="-128"/>
-              <a:ea typeface="BIZ UDPゴシック" panose="020B0400000000000000" pitchFamily="50" charset="-128"/>
+            <a:endParaRPr lang="en-US" altLang="ja-JP" sz="1600" kern="0">
+              <a:latin typeface="Source Code Pro Semibold" panose="020B0609030403020204" pitchFamily="49" charset="0"/>
+              <a:ea typeface="Source Code Pro Semibold" panose="020B0609030403020204" pitchFamily="49" charset="0"/>
             </a:endParaRPr>
           </a:p>
           <a:p>
             <a:pPr algn="l" eaLnBrk="1"/>
             <a:r>
-              <a:rPr kumimoji="1" lang="en-US" altLang="ja-JP" sz="1800" kern="0">
-                <a:latin typeface="BIZ UDPゴシック" panose="020B0400000000000000" pitchFamily="50" charset="-128"/>
-                <a:ea typeface="BIZ UDPゴシック" panose="020B0400000000000000" pitchFamily="50" charset="-128"/>
+              <a:rPr kumimoji="1" lang="en-US" altLang="ja-JP" sz="1600" kern="0">
+                <a:latin typeface="Source Code Pro Semibold" panose="020B0609030403020204" pitchFamily="49" charset="0"/>
+                <a:ea typeface="Source Code Pro Semibold" panose="020B0609030403020204" pitchFamily="49" charset="0"/>
               </a:rPr>
               <a:t>--separator </a:t>
             </a:r>
             <a:r>
-              <a:rPr kumimoji="1" lang="ja-JP" altLang="en-US" sz="1800" kern="0">
-                <a:latin typeface="BIZ UDPゴシック" panose="020B0400000000000000" pitchFamily="50" charset="-128"/>
+              <a:rPr kumimoji="1" lang="ja-JP" altLang="en-US" sz="1600" kern="0">
+                <a:latin typeface="Source Code Pro Semibold" panose="020B0609030403020204" pitchFamily="49" charset="0"/>
                 <a:ea typeface="BIZ UDPゴシック" panose="020B0400000000000000" pitchFamily="50" charset="-128"/>
               </a:rPr>
               <a:t>または </a:t>
             </a:r>
             <a:r>
-              <a:rPr kumimoji="1" lang="en-US" altLang="ja-JP" sz="1800" kern="0">
-                <a:latin typeface="BIZ UDPゴシック" panose="020B0400000000000000" pitchFamily="50" charset="-128"/>
-                <a:ea typeface="BIZ UDPゴシック" panose="020B0400000000000000" pitchFamily="50" charset="-128"/>
+              <a:rPr kumimoji="1" lang="en-US" altLang="ja-JP" sz="1600" kern="0">
+                <a:latin typeface="Source Code Pro Semibold" panose="020B0609030403020204" pitchFamily="49" charset="0"/>
+                <a:ea typeface="Source Code Pro Semibold" panose="020B0609030403020204" pitchFamily="49" charset="0"/>
               </a:rPr>
               <a:t>-sp </a:t>
             </a:r>
             <a:r>
-              <a:rPr kumimoji="1" lang="ja-JP" altLang="en-US" sz="1800" kern="0">
-                <a:latin typeface="BIZ UDPゴシック" panose="020B0400000000000000" pitchFamily="50" charset="-128"/>
+              <a:rPr kumimoji="1" lang="ja-JP" altLang="en-US" sz="1600" kern="0">
+                <a:latin typeface="Source Code Pro Semibold" panose="020B0609030403020204" pitchFamily="49" charset="0"/>
                 <a:ea typeface="BIZ UDPゴシック" panose="020B0400000000000000" pitchFamily="50" charset="-128"/>
               </a:rPr>
               <a:t>　章節番号とタイトルの間の区切り文字を指定します</a:t>
             </a:r>
-            <a:endParaRPr kumimoji="1" lang="en-US" altLang="ja-JP" sz="1800" kern="0">
-              <a:latin typeface="BIZ UDPゴシック" panose="020B0400000000000000" pitchFamily="50" charset="-128"/>
-              <a:ea typeface="BIZ UDPゴシック" panose="020B0400000000000000" pitchFamily="50" charset="-128"/>
+            <a:endParaRPr kumimoji="1" lang="en-US" altLang="ja-JP" sz="1600" kern="0">
+              <a:latin typeface="Source Code Pro Semibold" panose="020B0609030403020204" pitchFamily="49" charset="0"/>
+              <a:ea typeface="Source Code Pro Semibold" panose="020B0609030403020204" pitchFamily="49" charset="0"/>
             </a:endParaRPr>
           </a:p>
           <a:p>
             <a:pPr algn="l" eaLnBrk="1"/>
             <a:r>
-              <a:rPr kumimoji="1" lang="ja-JP" altLang="en-US" sz="1800" kern="0">
-                <a:latin typeface="BIZ UDPゴシック" panose="020B0400000000000000" pitchFamily="50" charset="-128"/>
+              <a:rPr kumimoji="1" lang="ja-JP" altLang="en-US" sz="1600" kern="0">
+                <a:latin typeface="Source Code Pro Semibold" panose="020B0609030403020204" pitchFamily="49" charset="0"/>
                 <a:ea typeface="BIZ UDPゴシック" panose="020B0400000000000000" pitchFamily="50" charset="-128"/>
               </a:rPr>
               <a:t>　例：　</a:t>
             </a:r>
             <a:r>
-              <a:rPr kumimoji="1" lang="en-US" altLang="ja-JP" sz="1800" kern="0">
-                <a:latin typeface="BIZ UDPゴシック" panose="020B0400000000000000" pitchFamily="50" charset="-128"/>
-                <a:ea typeface="BIZ UDPゴシック" panose="020B0400000000000000" pitchFamily="50" charset="-128"/>
+              <a:rPr kumimoji="1" lang="en-US" altLang="ja-JP" sz="1600" kern="0">
+                <a:latin typeface="Source Code Pro Semibold" panose="020B0609030403020204" pitchFamily="49" charset="0"/>
+                <a:ea typeface="Source Code Pro Semibold" panose="020B0609030403020204" pitchFamily="49" charset="0"/>
               </a:rPr>
               <a:t>-sp '&gt; '</a:t>
             </a:r>
           </a:p>
           <a:p>
             <a:pPr algn="l" eaLnBrk="1"/>
-            <a:endParaRPr kumimoji="1" lang="en-US" altLang="ja-JP" sz="1800" kern="0">
-              <a:latin typeface="BIZ UDPゴシック" panose="020B0400000000000000" pitchFamily="50" charset="-128"/>
-              <a:ea typeface="BIZ UDPゴシック" panose="020B0400000000000000" pitchFamily="50" charset="-128"/>
+            <a:endParaRPr kumimoji="1" lang="en-US" altLang="ja-JP" sz="1600" kern="0">
+              <a:latin typeface="Source Code Pro Semibold" panose="020B0609030403020204" pitchFamily="49" charset="0"/>
+              <a:ea typeface="Source Code Pro Semibold" panose="020B0609030403020204" pitchFamily="49" charset="0"/>
             </a:endParaRPr>
           </a:p>
           <a:p>
             <a:pPr eaLnBrk="1"/>
             <a:r>
-              <a:rPr kumimoji="1" lang="en-US" altLang="ja-JP" sz="1800" kern="0">
-                <a:latin typeface="BIZ UDPゴシック" panose="020B0400000000000000" pitchFamily="50" charset="-128"/>
-                <a:ea typeface="BIZ UDPゴシック" panose="020B0400000000000000" pitchFamily="50" charset="-128"/>
+              <a:rPr kumimoji="1" lang="en-US" altLang="ja-JP" sz="1600" kern="0">
+                <a:latin typeface="Source Code Pro Semibold" panose="020B0609030403020204" pitchFamily="49" charset="0"/>
+                <a:ea typeface="Source Code Pro Semibold" panose="020B0609030403020204" pitchFamily="49" charset="0"/>
               </a:rPr>
               <a:t>--delimitter </a:t>
             </a:r>
             <a:r>
-              <a:rPr kumimoji="1" lang="ja-JP" altLang="en-US" sz="1800" kern="0">
-                <a:latin typeface="BIZ UDPゴシック" panose="020B0400000000000000" pitchFamily="50" charset="-128"/>
+              <a:rPr kumimoji="1" lang="ja-JP" altLang="en-US" sz="1600" kern="0">
+                <a:latin typeface="Source Code Pro Semibold" panose="020B0609030403020204" pitchFamily="49" charset="0"/>
                 <a:ea typeface="BIZ UDPゴシック" panose="020B0400000000000000" pitchFamily="50" charset="-128"/>
               </a:rPr>
               <a:t>または </a:t>
             </a:r>
             <a:r>
-              <a:rPr kumimoji="1" lang="en-US" altLang="ja-JP" sz="1800" kern="0">
-                <a:latin typeface="BIZ UDPゴシック" panose="020B0400000000000000" pitchFamily="50" charset="-128"/>
-                <a:ea typeface="BIZ UDPゴシック" panose="020B0400000000000000" pitchFamily="50" charset="-128"/>
+              <a:rPr kumimoji="1" lang="en-US" altLang="ja-JP" sz="1600" kern="0">
+                <a:latin typeface="Source Code Pro Semibold" panose="020B0609030403020204" pitchFamily="49" charset="0"/>
+                <a:ea typeface="Source Code Pro Semibold" panose="020B0609030403020204" pitchFamily="49" charset="0"/>
               </a:rPr>
               <a:t>-dl</a:t>
             </a:r>
             <a:r>
-              <a:rPr kumimoji="1" lang="ja-JP" altLang="en-US" sz="1800" kern="0">
-                <a:latin typeface="BIZ UDPゴシック" panose="020B0400000000000000" pitchFamily="50" charset="-128"/>
+              <a:rPr kumimoji="1" lang="ja-JP" altLang="en-US" sz="1600" kern="0">
+                <a:latin typeface="Source Code Pro Semibold" panose="020B0609030403020204" pitchFamily="49" charset="0"/>
                 <a:ea typeface="BIZ UDPゴシック" panose="020B0400000000000000" pitchFamily="50" charset="-128"/>
               </a:rPr>
               <a:t>　　章番号と節番号の間の区切り文字を指定します</a:t>
             </a:r>
-            <a:endParaRPr kumimoji="1" lang="en-US" altLang="ja-JP" sz="1800" kern="0">
-              <a:latin typeface="BIZ UDPゴシック" panose="020B0400000000000000" pitchFamily="50" charset="-128"/>
-              <a:ea typeface="BIZ UDPゴシック" panose="020B0400000000000000" pitchFamily="50" charset="-128"/>
+            <a:endParaRPr kumimoji="1" lang="en-US" altLang="ja-JP" sz="1600" kern="0">
+              <a:latin typeface="Source Code Pro Semibold" panose="020B0609030403020204" pitchFamily="49" charset="0"/>
+              <a:ea typeface="Source Code Pro Semibold" panose="020B0609030403020204" pitchFamily="49" charset="0"/>
             </a:endParaRPr>
           </a:p>
           <a:p>
             <a:pPr eaLnBrk="1"/>
             <a:r>
-              <a:rPr kumimoji="1" lang="ja-JP" altLang="en-US" sz="1800" kern="0">
-                <a:latin typeface="BIZ UDPゴシック" panose="020B0400000000000000" pitchFamily="50" charset="-128"/>
+              <a:rPr kumimoji="1" lang="ja-JP" altLang="en-US" sz="1600" kern="0">
+                <a:latin typeface="Source Code Pro Semibold" panose="020B0609030403020204" pitchFamily="49" charset="0"/>
                 <a:ea typeface="BIZ UDPゴシック" panose="020B0400000000000000" pitchFamily="50" charset="-128"/>
               </a:rPr>
               <a:t>　例：　</a:t>
             </a:r>
             <a:r>
-              <a:rPr kumimoji="1" lang="en-US" altLang="ja-JP" sz="1800" kern="0">
-                <a:latin typeface="BIZ UDPゴシック" panose="020B0400000000000000" pitchFamily="50" charset="-128"/>
-                <a:ea typeface="BIZ UDPゴシック" panose="020B0400000000000000" pitchFamily="50" charset="-128"/>
+              <a:rPr kumimoji="1" lang="en-US" altLang="ja-JP" sz="1600" kern="0">
+                <a:latin typeface="Source Code Pro Semibold" panose="020B0609030403020204" pitchFamily="49" charset="0"/>
+                <a:ea typeface="Source Code Pro Semibold" panose="020B0609030403020204" pitchFamily="49" charset="0"/>
               </a:rPr>
               <a:t>-dl '-'</a:t>
             </a:r>
           </a:p>
           <a:p>
             <a:pPr algn="l" eaLnBrk="1"/>
-            <a:endParaRPr kumimoji="1" lang="en-US" altLang="ja-JP" sz="1800" kern="0">
-              <a:latin typeface="BIZ UDPゴシック" panose="020B0400000000000000" pitchFamily="50" charset="-128"/>
-              <a:ea typeface="BIZ UDPゴシック" panose="020B0400000000000000" pitchFamily="50" charset="-128"/>
+            <a:endParaRPr kumimoji="1" lang="en-US" altLang="ja-JP" sz="1600" kern="0">
+              <a:latin typeface="Source Code Pro Semibold" panose="020B0609030403020204" pitchFamily="49" charset="0"/>
+              <a:ea typeface="Source Code Pro Semibold" panose="020B0609030403020204" pitchFamily="49" charset="0"/>
             </a:endParaRPr>
           </a:p>
           <a:p>
             <a:pPr algn="l" eaLnBrk="1"/>
             <a:r>
-              <a:rPr kumimoji="1" lang="en-US" altLang="ja-JP" sz="1800" kern="0">
-                <a:latin typeface="BIZ UDPゴシック" panose="020B0400000000000000" pitchFamily="50" charset="-128"/>
-                <a:ea typeface="BIZ UDPゴシック" panose="020B0400000000000000" pitchFamily="50" charset="-128"/>
+              <a:rPr kumimoji="1" lang="en-US" altLang="ja-JP" sz="1600" kern="0">
+                <a:latin typeface="Source Code Pro Semibold" panose="020B0609030403020204" pitchFamily="49" charset="0"/>
+                <a:ea typeface="Source Code Pro Semibold" panose="020B0609030403020204" pitchFamily="49" charset="0"/>
               </a:rPr>
               <a:t>--deletecsl</a:t>
             </a:r>
             <a:r>
-              <a:rPr kumimoji="1" lang="ja-JP" altLang="en-US" sz="1800" kern="0">
-                <a:latin typeface="BIZ UDPゴシック" panose="020B0400000000000000" pitchFamily="50" charset="-128"/>
+              <a:rPr kumimoji="1" lang="ja-JP" altLang="en-US" sz="1600" kern="0">
+                <a:latin typeface="Source Code Pro Semibold" panose="020B0609030403020204" pitchFamily="49" charset="0"/>
                 <a:ea typeface="BIZ UDPゴシック" panose="020B0400000000000000" pitchFamily="50" charset="-128"/>
               </a:rPr>
               <a:t> または </a:t>
             </a:r>
             <a:r>
-              <a:rPr kumimoji="1" lang="en-US" altLang="ja-JP" sz="1800" kern="0">
-                <a:latin typeface="BIZ UDPゴシック" panose="020B0400000000000000" pitchFamily="50" charset="-128"/>
-                <a:ea typeface="BIZ UDPゴシック" panose="020B0400000000000000" pitchFamily="50" charset="-128"/>
+              <a:rPr kumimoji="1" lang="en-US" altLang="ja-JP" sz="1600" kern="0">
+                <a:latin typeface="Source Code Pro Semibold" panose="020B0609030403020204" pitchFamily="49" charset="0"/>
+                <a:ea typeface="Source Code Pro Semibold" panose="020B0609030403020204" pitchFamily="49" charset="0"/>
               </a:rPr>
               <a:t>-csl</a:t>
             </a:r>
             <a:r>
-              <a:rPr kumimoji="1" lang="ja-JP" altLang="en-US" sz="1800" kern="0">
-                <a:latin typeface="BIZ UDPゴシック" panose="020B0400000000000000" pitchFamily="50" charset="-128"/>
+              <a:rPr kumimoji="1" lang="ja-JP" altLang="en-US" sz="1600" kern="0">
+                <a:latin typeface="Source Code Pro Semibold" panose="020B0609030403020204" pitchFamily="49" charset="0"/>
                 <a:ea typeface="BIZ UDPゴシック" panose="020B0400000000000000" pitchFamily="50" charset="-128"/>
               </a:rPr>
               <a:t>　　</a:t>
             </a:r>
             <a:r>
-              <a:rPr kumimoji="1" lang="en-US" altLang="ja-JP" sz="1800" kern="0">
-                <a:latin typeface="BIZ UDPゴシック" panose="020B0400000000000000" pitchFamily="50" charset="-128"/>
-                <a:ea typeface="BIZ UDPゴシック" panose="020B0400000000000000" pitchFamily="50" charset="-128"/>
+              <a:rPr kumimoji="1" lang="en-US" altLang="ja-JP" sz="1600" kern="0">
+                <a:latin typeface="Source Code Pro Semibold" panose="020B0609030403020204" pitchFamily="49" charset="0"/>
+                <a:ea typeface="Source Code Pro Semibold" panose="020B0609030403020204" pitchFamily="49" charset="0"/>
               </a:rPr>
               <a:t>#CSL# </a:t>
             </a:r>
             <a:r>
-              <a:rPr kumimoji="1" lang="ja-JP" altLang="en-US" sz="1800" kern="0">
-                <a:latin typeface="BIZ UDPゴシック" panose="020B0400000000000000" pitchFamily="50" charset="-128"/>
+              <a:rPr kumimoji="1" lang="ja-JP" altLang="en-US" sz="1600" kern="0">
+                <a:latin typeface="Source Code Pro Semibold" panose="020B0609030403020204" pitchFamily="49" charset="0"/>
                 <a:ea typeface="BIZ UDPゴシック" panose="020B0400000000000000" pitchFamily="50" charset="-128"/>
               </a:rPr>
               <a:t>を含むスライドを削除します</a:t>
             </a:r>
-            <a:endParaRPr kumimoji="1" lang="en-US" altLang="ja-JP" sz="1800" kern="0">
-              <a:latin typeface="BIZ UDPゴシック" panose="020B0400000000000000" pitchFamily="50" charset="-128"/>
-              <a:ea typeface="BIZ UDPゴシック" panose="020B0400000000000000" pitchFamily="50" charset="-128"/>
+            <a:endParaRPr kumimoji="1" lang="en-US" altLang="ja-JP" sz="1600" kern="0">
+              <a:latin typeface="Source Code Pro Semibold" panose="020B0609030403020204" pitchFamily="49" charset="0"/>
+              <a:ea typeface="Source Code Pro Semibold" panose="020B0609030403020204" pitchFamily="49" charset="0"/>
             </a:endParaRPr>
           </a:p>
           <a:p>
             <a:pPr algn="l" eaLnBrk="1"/>
             <a:r>
-              <a:rPr kumimoji="1" lang="ja-JP" altLang="en-US" sz="1800" kern="0">
-                <a:latin typeface="BIZ UDPゴシック" panose="020B0400000000000000" pitchFamily="50" charset="-128"/>
+              <a:rPr kumimoji="1" lang="ja-JP" altLang="en-US" sz="1600" kern="0">
+                <a:latin typeface="Source Code Pro Semibold" panose="020B0609030403020204" pitchFamily="49" charset="0"/>
                 <a:ea typeface="BIZ UDPゴシック" panose="020B0400000000000000" pitchFamily="50" charset="-128"/>
               </a:rPr>
               <a:t>　例：　</a:t>
             </a:r>
             <a:r>
-              <a:rPr kumimoji="1" lang="en-US" altLang="ja-JP" sz="1800" kern="0">
-                <a:latin typeface="BIZ UDPゴシック" panose="020B0400000000000000" pitchFamily="50" charset="-128"/>
-                <a:ea typeface="BIZ UDPゴシック" panose="020B0400000000000000" pitchFamily="50" charset="-128"/>
+              <a:rPr kumimoji="1" lang="en-US" altLang="ja-JP" sz="1600" kern="0">
+                <a:latin typeface="Source Code Pro Semibold" panose="020B0609030403020204" pitchFamily="49" charset="0"/>
+                <a:ea typeface="Source Code Pro Semibold" panose="020B0609030403020204" pitchFamily="49" charset="0"/>
               </a:rPr>
               <a:t>-csl</a:t>
             </a:r>
@@ -10464,129 +11061,244 @@
           <a:p>
             <a:pPr algn="l" eaLnBrk="1"/>
             <a:r>
-              <a:rPr kumimoji="1" lang="en-US" altLang="ja-JP" sz="1800" kern="0">
-                <a:latin typeface="BIZ UDPゴシック" panose="020B0400000000000000" pitchFamily="50" charset="-128"/>
-                <a:ea typeface="BIZ UDPゴシック" panose="020B0400000000000000" pitchFamily="50" charset="-128"/>
+              <a:rPr kumimoji="1" lang="en-US" altLang="ja-JP" sz="1600" kern="0">
+                <a:latin typeface="Source Code Pro Semibold" panose="020B0609030403020204" pitchFamily="49" charset="0"/>
+                <a:ea typeface="Source Code Pro Semibold" panose="020B0609030403020204" pitchFamily="49" charset="0"/>
               </a:rPr>
               <a:t>--deletecsp</a:t>
             </a:r>
             <a:r>
-              <a:rPr kumimoji="1" lang="ja-JP" altLang="en-US" sz="1800" kern="0">
-                <a:latin typeface="BIZ UDPゴシック" panose="020B0400000000000000" pitchFamily="50" charset="-128"/>
+              <a:rPr kumimoji="1" lang="ja-JP" altLang="en-US" sz="1600" kern="0">
+                <a:latin typeface="Source Code Pro Semibold" panose="020B0609030403020204" pitchFamily="49" charset="0"/>
                 <a:ea typeface="BIZ UDPゴシック" panose="020B0400000000000000" pitchFamily="50" charset="-128"/>
               </a:rPr>
               <a:t> または </a:t>
             </a:r>
             <a:r>
-              <a:rPr kumimoji="1" lang="en-US" altLang="ja-JP" sz="1800" kern="0">
-                <a:latin typeface="BIZ UDPゴシック" panose="020B0400000000000000" pitchFamily="50" charset="-128"/>
-                <a:ea typeface="BIZ UDPゴシック" panose="020B0400000000000000" pitchFamily="50" charset="-128"/>
+              <a:rPr kumimoji="1" lang="en-US" altLang="ja-JP" sz="1600" kern="0">
+                <a:latin typeface="Source Code Pro Semibold" panose="020B0609030403020204" pitchFamily="49" charset="0"/>
+                <a:ea typeface="Source Code Pro Semibold" panose="020B0609030403020204" pitchFamily="49" charset="0"/>
               </a:rPr>
               <a:t>-csp</a:t>
             </a:r>
             <a:r>
-              <a:rPr kumimoji="1" lang="ja-JP" altLang="en-US" sz="1800" kern="0">
-                <a:latin typeface="BIZ UDPゴシック" panose="020B0400000000000000" pitchFamily="50" charset="-128"/>
+              <a:rPr kumimoji="1" lang="ja-JP" altLang="en-US" sz="1600" kern="0">
+                <a:latin typeface="Source Code Pro Semibold" panose="020B0609030403020204" pitchFamily="49" charset="0"/>
                 <a:ea typeface="BIZ UDPゴシック" panose="020B0400000000000000" pitchFamily="50" charset="-128"/>
               </a:rPr>
               <a:t>　　</a:t>
             </a:r>
             <a:r>
-              <a:rPr kumimoji="1" lang="en-US" altLang="ja-JP" sz="1800" kern="0">
-                <a:latin typeface="BIZ UDPゴシック" panose="020B0400000000000000" pitchFamily="50" charset="-128"/>
-                <a:ea typeface="BIZ UDPゴシック" panose="020B0400000000000000" pitchFamily="50" charset="-128"/>
+              <a:rPr kumimoji="1" lang="en-US" altLang="ja-JP" sz="1600" kern="0">
+                <a:latin typeface="Source Code Pro Semibold" panose="020B0609030403020204" pitchFamily="49" charset="0"/>
+                <a:ea typeface="Source Code Pro Semibold" panose="020B0609030403020204" pitchFamily="49" charset="0"/>
               </a:rPr>
               <a:t>#CSP# </a:t>
             </a:r>
             <a:r>
-              <a:rPr kumimoji="1" lang="ja-JP" altLang="en-US" sz="1800" kern="0">
-                <a:latin typeface="BIZ UDPゴシック" panose="020B0400000000000000" pitchFamily="50" charset="-128"/>
+              <a:rPr kumimoji="1" lang="ja-JP" altLang="en-US" sz="1600" kern="0">
+                <a:latin typeface="Source Code Pro Semibold" panose="020B0609030403020204" pitchFamily="49" charset="0"/>
                 <a:ea typeface="BIZ UDPゴシック" panose="020B0400000000000000" pitchFamily="50" charset="-128"/>
               </a:rPr>
               <a:t>を含むシェイプを削除します</a:t>
             </a:r>
-            <a:endParaRPr kumimoji="1" lang="en-US" altLang="ja-JP" sz="1800" kern="0">
-              <a:latin typeface="BIZ UDPゴシック" panose="020B0400000000000000" pitchFamily="50" charset="-128"/>
-              <a:ea typeface="BIZ UDPゴシック" panose="020B0400000000000000" pitchFamily="50" charset="-128"/>
+            <a:endParaRPr kumimoji="1" lang="en-US" altLang="ja-JP" sz="1600" kern="0">
+              <a:latin typeface="Source Code Pro Semibold" panose="020B0609030403020204" pitchFamily="49" charset="0"/>
+              <a:ea typeface="Source Code Pro Semibold" panose="020B0609030403020204" pitchFamily="49" charset="0"/>
             </a:endParaRPr>
           </a:p>
           <a:p>
             <a:pPr eaLnBrk="1"/>
             <a:r>
-              <a:rPr kumimoji="1" lang="ja-JP" altLang="en-US" sz="1800" kern="0">
-                <a:latin typeface="BIZ UDPゴシック" panose="020B0400000000000000" pitchFamily="50" charset="-128"/>
+              <a:rPr kumimoji="1" lang="ja-JP" altLang="en-US" sz="1600" kern="0">
+                <a:latin typeface="Source Code Pro Semibold" panose="020B0609030403020204" pitchFamily="49" charset="0"/>
                 <a:ea typeface="BIZ UDPゴシック" panose="020B0400000000000000" pitchFamily="50" charset="-128"/>
               </a:rPr>
               <a:t>　例：　</a:t>
             </a:r>
             <a:r>
-              <a:rPr kumimoji="1" lang="en-US" altLang="ja-JP" sz="1800" kern="0">
-                <a:latin typeface="BIZ UDPゴシック" panose="020B0400000000000000" pitchFamily="50" charset="-128"/>
-                <a:ea typeface="BIZ UDPゴシック" panose="020B0400000000000000" pitchFamily="50" charset="-128"/>
+              <a:rPr kumimoji="1" lang="en-US" altLang="ja-JP" sz="1600" kern="0">
+                <a:latin typeface="Source Code Pro Semibold" panose="020B0609030403020204" pitchFamily="49" charset="0"/>
+                <a:ea typeface="Source Code Pro Semibold" panose="020B0609030403020204" pitchFamily="49" charset="0"/>
               </a:rPr>
               <a:t>-csp</a:t>
             </a:r>
           </a:p>
           <a:p>
             <a:pPr algn="l" eaLnBrk="1"/>
-            <a:endParaRPr kumimoji="1" lang="en-US" altLang="ja-JP" sz="1800" kern="0">
-              <a:latin typeface="BIZ UDPゴシック" panose="020B0400000000000000" pitchFamily="50" charset="-128"/>
-              <a:ea typeface="BIZ UDPゴシック" panose="020B0400000000000000" pitchFamily="50" charset="-128"/>
+            <a:endParaRPr kumimoji="1" lang="en-US" altLang="ja-JP" sz="1600" kern="0">
+              <a:latin typeface="Source Code Pro Semibold" panose="020B0609030403020204" pitchFamily="49" charset="0"/>
+              <a:ea typeface="Source Code Pro Semibold" panose="020B0609030403020204" pitchFamily="49" charset="0"/>
             </a:endParaRPr>
           </a:p>
           <a:p>
             <a:pPr algn="l" eaLnBrk="1"/>
             <a:r>
-              <a:rPr kumimoji="1" lang="en-US" altLang="ja-JP" sz="1800" kern="0">
-                <a:latin typeface="BIZ UDPゴシック" panose="020B0400000000000000" pitchFamily="50" charset="-128"/>
-                <a:ea typeface="BIZ UDPゴシック" panose="020B0400000000000000" pitchFamily="50" charset="-128"/>
-              </a:rPr>
-              <a:t>--postfix </a:t>
-            </a:r>
-            <a:r>
-              <a:rPr kumimoji="1" lang="ja-JP" altLang="en-US" sz="1800" kern="0">
-                <a:latin typeface="BIZ UDPゴシック" panose="020B0400000000000000" pitchFamily="50" charset="-128"/>
+              <a:rPr kumimoji="1" lang="en-US" altLang="ja-JP" sz="1600" kern="0">
+                <a:latin typeface="Source Code Pro Semibold" panose="020B0609030403020204" pitchFamily="49" charset="0"/>
+                <a:ea typeface="Source Code Pro Semibold" panose="020B0609030403020204" pitchFamily="49" charset="0"/>
+              </a:rPr>
+              <a:t>--target-trailer </a:t>
+            </a:r>
+            <a:r>
+              <a:rPr kumimoji="1" lang="ja-JP" altLang="en-US" sz="1600" kern="0">
+                <a:latin typeface="Source Code Pro Semibold" panose="020B0609030403020204" pitchFamily="49" charset="0"/>
                 <a:ea typeface="BIZ UDPゴシック" panose="020B0400000000000000" pitchFamily="50" charset="-128"/>
               </a:rPr>
               <a:t>または </a:t>
             </a:r>
             <a:r>
-              <a:rPr kumimoji="1" lang="en-US" altLang="ja-JP" sz="1800" kern="0">
-                <a:latin typeface="BIZ UDPゴシック" panose="020B0400000000000000" pitchFamily="50" charset="-128"/>
-                <a:ea typeface="BIZ UDPゴシック" panose="020B0400000000000000" pitchFamily="50" charset="-128"/>
-              </a:rPr>
-              <a:t>-p</a:t>
-            </a:r>
-            <a:r>
-              <a:rPr kumimoji="1" lang="ja-JP" altLang="en-US" sz="1800" kern="0">
-                <a:latin typeface="BIZ UDPゴシック" panose="020B0400000000000000" pitchFamily="50" charset="-128"/>
-                <a:ea typeface="BIZ UDPゴシック" panose="020B0400000000000000" pitchFamily="50" charset="-128"/>
-              </a:rPr>
-              <a:t>　　変換後のファイル名に付加する文字列を指定します</a:t>
-            </a:r>
-            <a:endParaRPr kumimoji="1" lang="en-US" altLang="ja-JP" sz="1800" kern="0">
-              <a:latin typeface="BIZ UDPゴシック" panose="020B0400000000000000" pitchFamily="50" charset="-128"/>
-              <a:ea typeface="BIZ UDPゴシック" panose="020B0400000000000000" pitchFamily="50" charset="-128"/>
+              <a:rPr kumimoji="1" lang="en-US" altLang="ja-JP" sz="1600" kern="0">
+                <a:latin typeface="Source Code Pro Semibold" panose="020B0609030403020204" pitchFamily="49" charset="0"/>
+                <a:ea typeface="Source Code Pro Semibold" panose="020B0609030403020204" pitchFamily="49" charset="0"/>
+              </a:rPr>
+              <a:t>-tt</a:t>
+            </a:r>
+            <a:r>
+              <a:rPr kumimoji="1" lang="ja-JP" altLang="en-US" sz="1600" kern="0">
+                <a:latin typeface="Source Code Pro Semibold" panose="020B0609030403020204" pitchFamily="49" charset="0"/>
+                <a:ea typeface="BIZ UDPゴシック" panose="020B0400000000000000" pitchFamily="50" charset="-128"/>
+              </a:rPr>
+              <a:t>　　</a:t>
+            </a:r>
+            <a:r>
+              <a:rPr kumimoji="1" lang="en-US" altLang="ja-JP" sz="1600" kern="0">
+                <a:latin typeface="Source Code Pro Semibold" panose="020B0609030403020204" pitchFamily="49" charset="0"/>
+                <a:ea typeface="Source Code Pro Semibold" panose="020B0609030403020204" pitchFamily="49" charset="0"/>
+              </a:rPr>
+              <a:t>	target(</a:t>
+            </a:r>
+            <a:r>
+              <a:rPr kumimoji="1" lang="ja-JP" altLang="en-US" sz="1600" kern="0">
+                <a:latin typeface="Source Code Pro Semibold" panose="020B0609030403020204" pitchFamily="49" charset="0"/>
+                <a:ea typeface="BIZ UDPゴシック" panose="020B0400000000000000" pitchFamily="50" charset="-128"/>
+              </a:rPr>
+              <a:t>変換後のファイル</a:t>
+            </a:r>
+            <a:r>
+              <a:rPr kumimoji="1" lang="en-US" altLang="ja-JP" sz="1600" kern="0">
+                <a:latin typeface="Source Code Pro Semibold" panose="020B0609030403020204" pitchFamily="49" charset="0"/>
+                <a:ea typeface="Source Code Pro Semibold" panose="020B0609030403020204" pitchFamily="49" charset="0"/>
+              </a:rPr>
+              <a:t>)</a:t>
+            </a:r>
+            <a:r>
+              <a:rPr kumimoji="1" lang="ja-JP" altLang="en-US" sz="1600" kern="0">
+                <a:latin typeface="Source Code Pro Semibold" panose="020B0609030403020204" pitchFamily="49" charset="0"/>
+                <a:ea typeface="BIZ UDPゴシック" panose="020B0400000000000000" pitchFamily="50" charset="-128"/>
+              </a:rPr>
+              <a:t>名に付加する文字列を指定します</a:t>
+            </a:r>
+            <a:endParaRPr kumimoji="1" lang="en-US" altLang="ja-JP" sz="1600" kern="0">
+              <a:latin typeface="Source Code Pro Semibold" panose="020B0609030403020204" pitchFamily="49" charset="0"/>
+              <a:ea typeface="Source Code Pro Semibold" panose="020B0609030403020204" pitchFamily="49" charset="0"/>
             </a:endParaRPr>
           </a:p>
           <a:p>
             <a:pPr algn="l" eaLnBrk="1"/>
             <a:r>
-              <a:rPr kumimoji="1" lang="ja-JP" altLang="en-US" sz="1800" kern="0">
-                <a:latin typeface="BIZ UDPゴシック" panose="020B0400000000000000" pitchFamily="50" charset="-128"/>
+              <a:rPr kumimoji="1" lang="ja-JP" altLang="en-US" sz="1600" kern="0">
+                <a:latin typeface="Source Code Pro Semibold" panose="020B0609030403020204" pitchFamily="49" charset="0"/>
                 <a:ea typeface="BIZ UDPゴシック" panose="020B0400000000000000" pitchFamily="50" charset="-128"/>
               </a:rPr>
               <a:t>　例：  </a:t>
             </a:r>
             <a:r>
-              <a:rPr kumimoji="1" lang="en-US" altLang="ja-JP" sz="1800" kern="0">
-                <a:latin typeface="BIZ UDPゴシック" panose="020B0400000000000000" pitchFamily="50" charset="-128"/>
-                <a:ea typeface="BIZ UDPゴシック" panose="020B0400000000000000" pitchFamily="50" charset="-128"/>
-              </a:rPr>
-              <a:t>-p '_gen'</a:t>
-            </a:r>
-            <a:endParaRPr kumimoji="1" lang="ja-JP" altLang="en-US" sz="1800" kern="0">
-              <a:latin typeface="BIZ UDPゴシック" panose="020B0400000000000000" pitchFamily="50" charset="-128"/>
+              <a:rPr kumimoji="1" lang="en-US" altLang="ja-JP" sz="1600" kern="0">
+                <a:latin typeface="Source Code Pro Semibold" panose="020B0609030403020204" pitchFamily="49" charset="0"/>
+                <a:ea typeface="Source Code Pro Semibold" panose="020B0609030403020204" pitchFamily="49" charset="0"/>
+              </a:rPr>
+              <a:t>-tt '_gen'</a:t>
+            </a:r>
+          </a:p>
+          <a:p>
+            <a:pPr algn="l" eaLnBrk="1"/>
+            <a:endParaRPr lang="en-US" altLang="ja-JP" sz="1600" kern="0">
+              <a:latin typeface="Source Code Pro Semibold" panose="020B0609030403020204" pitchFamily="49" charset="0"/>
+              <a:ea typeface="Source Code Pro Semibold" panose="020B0609030403020204" pitchFamily="49" charset="0"/>
+            </a:endParaRPr>
+          </a:p>
+          <a:p>
+            <a:pPr algn="l" eaLnBrk="1"/>
+            <a:r>
+              <a:rPr kumimoji="1" lang="en-US" altLang="ja-JP" sz="1600" kern="0">
+                <a:latin typeface="Source Code Pro Semibold" panose="020B0609030403020204" pitchFamily="49" charset="0"/>
+                <a:ea typeface="Source Code Pro Semibold" panose="020B0609030403020204" pitchFamily="49" charset="0"/>
+              </a:rPr>
+              <a:t>--remove-source-trailer </a:t>
+            </a:r>
+            <a:r>
+              <a:rPr kumimoji="1" lang="ja-JP" altLang="en-US" sz="1600" kern="0">
+                <a:latin typeface="Source Code Pro Semibold" panose="020B0609030403020204" pitchFamily="49" charset="0"/>
+                <a:ea typeface="BIZ UDPゴシック" panose="020B0400000000000000" pitchFamily="50" charset="-128"/>
+              </a:rPr>
+              <a:t>または </a:t>
+            </a:r>
+            <a:r>
+              <a:rPr kumimoji="1" lang="en-US" altLang="ja-JP" sz="1600" kern="0">
+                <a:latin typeface="Source Code Pro Semibold" panose="020B0609030403020204" pitchFamily="49" charset="0"/>
+                <a:ea typeface="Source Code Pro Semibold" panose="020B0609030403020204" pitchFamily="49" charset="0"/>
+              </a:rPr>
+              <a:t>-rst</a:t>
+            </a:r>
+            <a:r>
+              <a:rPr kumimoji="1" lang="ja-JP" altLang="en-US" sz="1600" kern="0">
+                <a:latin typeface="Source Code Pro Semibold" panose="020B0609030403020204" pitchFamily="49" charset="0"/>
+                <a:ea typeface="BIZ UDPゴシック" panose="020B0400000000000000" pitchFamily="50" charset="-128"/>
+              </a:rPr>
+              <a:t>　  </a:t>
+            </a:r>
+            <a:r>
+              <a:rPr kumimoji="1" lang="en-US" altLang="ja-JP" sz="1600" kern="0">
+                <a:latin typeface="Source Code Pro Semibold" panose="020B0609030403020204" pitchFamily="49" charset="0"/>
+                <a:ea typeface="Source Code Pro Semibold" panose="020B0609030403020204" pitchFamily="49" charset="0"/>
+              </a:rPr>
+              <a:t>source(</a:t>
+            </a:r>
+            <a:r>
+              <a:rPr kumimoji="1" lang="ja-JP" altLang="en-US" sz="1600" kern="0">
+                <a:latin typeface="Source Code Pro Semibold" panose="020B0609030403020204" pitchFamily="49" charset="0"/>
+                <a:ea typeface="BIZ UDPゴシック" panose="020B0400000000000000" pitchFamily="50" charset="-128"/>
+              </a:rPr>
+              <a:t>変換元のファイル</a:t>
+            </a:r>
+            <a:r>
+              <a:rPr kumimoji="1" lang="en-US" altLang="ja-JP" sz="1600" kern="0">
+                <a:latin typeface="Source Code Pro Semibold" panose="020B0609030403020204" pitchFamily="49" charset="0"/>
+                <a:ea typeface="Source Code Pro Semibold" panose="020B0609030403020204" pitchFamily="49" charset="0"/>
+              </a:rPr>
+              <a:t>)</a:t>
+            </a:r>
+            <a:r>
+              <a:rPr kumimoji="1" lang="ja-JP" altLang="en-US" sz="1600" kern="0">
+                <a:latin typeface="Source Code Pro Semibold" panose="020B0609030403020204" pitchFamily="49" charset="0"/>
+                <a:ea typeface="BIZ UDPゴシック" panose="020B0400000000000000" pitchFamily="50" charset="-128"/>
+              </a:rPr>
+              <a:t>名から除去する文字列を指定します</a:t>
+            </a:r>
+            <a:endParaRPr kumimoji="1" lang="en-US" altLang="ja-JP" sz="1600" kern="0">
+              <a:latin typeface="Source Code Pro Semibold" panose="020B0609030403020204" pitchFamily="49" charset="0"/>
+              <a:ea typeface="Source Code Pro Semibold" panose="020B0609030403020204" pitchFamily="49" charset="0"/>
+            </a:endParaRPr>
+          </a:p>
+          <a:p>
+            <a:pPr algn="l" eaLnBrk="1"/>
+            <a:r>
+              <a:rPr kumimoji="1" lang="ja-JP" altLang="en-US" sz="1600" kern="0">
+                <a:latin typeface="Source Code Pro Semibold" panose="020B0609030403020204" pitchFamily="49" charset="0"/>
+                <a:ea typeface="BIZ UDPゴシック" panose="020B0400000000000000" pitchFamily="50" charset="-128"/>
+              </a:rPr>
+              <a:t>　例：  </a:t>
+            </a:r>
+            <a:r>
+              <a:rPr kumimoji="1" lang="en-US" altLang="ja-JP" sz="1600" kern="0">
+                <a:latin typeface="Source Code Pro Semibold" panose="020B0609030403020204" pitchFamily="49" charset="0"/>
+                <a:ea typeface="Source Code Pro Semibold" panose="020B0609030403020204" pitchFamily="49" charset="0"/>
+              </a:rPr>
+              <a:t>-tt '_sce'</a:t>
+            </a:r>
+            <a:endParaRPr kumimoji="1" lang="ja-JP" altLang="en-US" sz="1600" kern="0">
+              <a:latin typeface="Source Code Pro Semibold" panose="020B0609030403020204" pitchFamily="49" charset="0"/>
               <a:ea typeface="BIZ UDPゴシック" panose="020B0400000000000000" pitchFamily="50" charset="-128"/>
             </a:endParaRPr>
           </a:p>
